--- a/Report/6주차.pptx
+++ b/Report/6주차.pptx
@@ -5,14 +5,18 @@
     <p:sldMasterId id="2147483648" r:id="rId1"/>
   </p:sldMasterIdLst>
   <p:notesMasterIdLst>
-    <p:notesMasterId r:id="rId7"/>
+    <p:notesMasterId r:id="rId11"/>
   </p:notesMasterIdLst>
   <p:sldIdLst>
     <p:sldId id="256" r:id="rId2"/>
     <p:sldId id="259" r:id="rId3"/>
     <p:sldId id="280" r:id="rId4"/>
     <p:sldId id="267" r:id="rId5"/>
-    <p:sldId id="258" r:id="rId6"/>
+    <p:sldId id="282" r:id="rId6"/>
+    <p:sldId id="283" r:id="rId7"/>
+    <p:sldId id="284" r:id="rId8"/>
+    <p:sldId id="281" r:id="rId9"/>
+    <p:sldId id="258" r:id="rId10"/>
   </p:sldIdLst>
   <p:sldSz cx="12192000" cy="6858000"/>
   <p:notesSz cx="12192000" cy="6858000"/>
@@ -122,7 +126,7 @@
           <a:p>
             <a:fld id="{12912881-8C8D-44A6-AE66-9F7D64B0003F}" type="datetimeFigureOut">
               <a:rPr lang="ko-KR" altLang="en-US" smtClean="0"/>
-              <a:t>2026-08-05</a:t>
+              <a:t>2026-08-06</a:t>
             </a:fld>
             <a:endParaRPr lang="ko-KR" altLang="en-US"/>
           </a:p>
@@ -670,6 +674,438 @@
   <p:cSld>
     <p:spTree>
       <p:nvGrpSpPr>
+        <p:cNvPr id="1" name="">
+          <a:extLst>
+            <a:ext uri="{FF2B5EF4-FFF2-40B4-BE49-F238E27FC236}">
+              <a16:creationId xmlns:a16="http://schemas.microsoft.com/office/drawing/2014/main" id="{2368EB2B-7429-740D-4CAC-AB75FB9A3A36}"/>
+            </a:ext>
+          </a:extLst>
+        </p:cNvPr>
+        <p:cNvGrpSpPr/>
+        <p:nvPr/>
+      </p:nvGrpSpPr>
+      <p:grpSpPr>
+        <a:xfrm>
+          <a:off x="0" y="0"/>
+          <a:ext cx="0" cy="0"/>
+          <a:chOff x="0" y="0"/>
+          <a:chExt cx="0" cy="0"/>
+        </a:xfrm>
+      </p:grpSpPr>
+      <p:sp>
+        <p:nvSpPr>
+          <p:cNvPr id="2" name="슬라이드 이미지 개체 틀 1">
+            <a:extLst>
+              <a:ext uri="{FF2B5EF4-FFF2-40B4-BE49-F238E27FC236}">
+                <a16:creationId xmlns:a16="http://schemas.microsoft.com/office/drawing/2014/main" id="{24A29E88-5176-E796-CF9F-D9EACDE878D2}"/>
+              </a:ext>
+            </a:extLst>
+          </p:cNvPr>
+          <p:cNvSpPr>
+            <a:spLocks noGrp="1" noRot="1" noChangeAspect="1"/>
+          </p:cNvSpPr>
+          <p:nvPr>
+            <p:ph type="sldImg"/>
+          </p:nvPr>
+        </p:nvSpPr>
+        <p:spPr/>
+      </p:sp>
+      <p:sp>
+        <p:nvSpPr>
+          <p:cNvPr id="3" name="슬라이드 노트 개체 틀 2">
+            <a:extLst>
+              <a:ext uri="{FF2B5EF4-FFF2-40B4-BE49-F238E27FC236}">
+                <a16:creationId xmlns:a16="http://schemas.microsoft.com/office/drawing/2014/main" id="{709E23FD-7400-4A13-C042-DB572F15D380}"/>
+              </a:ext>
+            </a:extLst>
+          </p:cNvPr>
+          <p:cNvSpPr>
+            <a:spLocks noGrp="1"/>
+          </p:cNvSpPr>
+          <p:nvPr>
+            <p:ph type="body" idx="1"/>
+          </p:nvPr>
+        </p:nvSpPr>
+        <p:spPr/>
+        <p:txBody>
+          <a:bodyPr/>
+          <a:lstStyle/>
+          <a:p>
+            <a:endParaRPr lang="ko-KR" altLang="en-US" dirty="0"/>
+          </a:p>
+        </p:txBody>
+      </p:sp>
+      <p:sp>
+        <p:nvSpPr>
+          <p:cNvPr id="4" name="슬라이드 번호 개체 틀 3">
+            <a:extLst>
+              <a:ext uri="{FF2B5EF4-FFF2-40B4-BE49-F238E27FC236}">
+                <a16:creationId xmlns:a16="http://schemas.microsoft.com/office/drawing/2014/main" id="{F336FDEE-E700-59D1-0D3A-1B7E3B8F1193}"/>
+              </a:ext>
+            </a:extLst>
+          </p:cNvPr>
+          <p:cNvSpPr>
+            <a:spLocks noGrp="1"/>
+          </p:cNvSpPr>
+          <p:nvPr>
+            <p:ph type="sldNum" sz="quarter" idx="5"/>
+          </p:nvPr>
+        </p:nvSpPr>
+        <p:spPr/>
+        <p:txBody>
+          <a:bodyPr/>
+          <a:lstStyle/>
+          <a:p>
+            <a:fld id="{1840BF9F-FA8F-4CB1-839A-D4536A9CACB4}" type="slidenum">
+              <a:rPr lang="ko-KR" altLang="en-US" smtClean="0"/>
+              <a:t>5</a:t>
+            </a:fld>
+            <a:endParaRPr lang="ko-KR" altLang="en-US"/>
+          </a:p>
+        </p:txBody>
+      </p:sp>
+    </p:spTree>
+    <p:extLst>
+      <p:ext uri="{BB962C8B-B14F-4D97-AF65-F5344CB8AC3E}">
+        <p14:creationId xmlns:p14="http://schemas.microsoft.com/office/powerpoint/2010/main" val="124420916"/>
+      </p:ext>
+    </p:extLst>
+  </p:cSld>
+  <p:clrMapOvr>
+    <a:masterClrMapping/>
+  </p:clrMapOvr>
+</p:notes>
+</file>
+
+<file path=ppt/notesSlides/notesSlide5.xml><?xml version="1.0" encoding="utf-8"?>
+<p:notes xmlns:a="http://schemas.openxmlformats.org/drawingml/2006/main" xmlns:r="http://schemas.openxmlformats.org/officeDocument/2006/relationships" xmlns:p="http://schemas.openxmlformats.org/presentationml/2006/main">
+  <p:cSld>
+    <p:spTree>
+      <p:nvGrpSpPr>
+        <p:cNvPr id="1" name="">
+          <a:extLst>
+            <a:ext uri="{FF2B5EF4-FFF2-40B4-BE49-F238E27FC236}">
+              <a16:creationId xmlns:a16="http://schemas.microsoft.com/office/drawing/2014/main" id="{A0C931DC-AF08-254F-DC07-BFC707BF04C5}"/>
+            </a:ext>
+          </a:extLst>
+        </p:cNvPr>
+        <p:cNvGrpSpPr/>
+        <p:nvPr/>
+      </p:nvGrpSpPr>
+      <p:grpSpPr>
+        <a:xfrm>
+          <a:off x="0" y="0"/>
+          <a:ext cx="0" cy="0"/>
+          <a:chOff x="0" y="0"/>
+          <a:chExt cx="0" cy="0"/>
+        </a:xfrm>
+      </p:grpSpPr>
+      <p:sp>
+        <p:nvSpPr>
+          <p:cNvPr id="2" name="슬라이드 이미지 개체 틀 1">
+            <a:extLst>
+              <a:ext uri="{FF2B5EF4-FFF2-40B4-BE49-F238E27FC236}">
+                <a16:creationId xmlns:a16="http://schemas.microsoft.com/office/drawing/2014/main" id="{0D31FAA7-08A5-341A-E7D5-67E015607A37}"/>
+              </a:ext>
+            </a:extLst>
+          </p:cNvPr>
+          <p:cNvSpPr>
+            <a:spLocks noGrp="1" noRot="1" noChangeAspect="1"/>
+          </p:cNvSpPr>
+          <p:nvPr>
+            <p:ph type="sldImg"/>
+          </p:nvPr>
+        </p:nvSpPr>
+        <p:spPr/>
+      </p:sp>
+      <p:sp>
+        <p:nvSpPr>
+          <p:cNvPr id="3" name="슬라이드 노트 개체 틀 2">
+            <a:extLst>
+              <a:ext uri="{FF2B5EF4-FFF2-40B4-BE49-F238E27FC236}">
+                <a16:creationId xmlns:a16="http://schemas.microsoft.com/office/drawing/2014/main" id="{3DD74390-62D0-F2BF-3F76-AD62369ED312}"/>
+              </a:ext>
+            </a:extLst>
+          </p:cNvPr>
+          <p:cNvSpPr>
+            <a:spLocks noGrp="1"/>
+          </p:cNvSpPr>
+          <p:nvPr>
+            <p:ph type="body" idx="1"/>
+          </p:nvPr>
+        </p:nvSpPr>
+        <p:spPr/>
+        <p:txBody>
+          <a:bodyPr/>
+          <a:lstStyle/>
+          <a:p>
+            <a:endParaRPr lang="ko-KR" altLang="en-US" dirty="0"/>
+          </a:p>
+        </p:txBody>
+      </p:sp>
+      <p:sp>
+        <p:nvSpPr>
+          <p:cNvPr id="4" name="슬라이드 번호 개체 틀 3">
+            <a:extLst>
+              <a:ext uri="{FF2B5EF4-FFF2-40B4-BE49-F238E27FC236}">
+                <a16:creationId xmlns:a16="http://schemas.microsoft.com/office/drawing/2014/main" id="{66DCA1C8-6F0D-B46F-81E0-E35E4198AF0D}"/>
+              </a:ext>
+            </a:extLst>
+          </p:cNvPr>
+          <p:cNvSpPr>
+            <a:spLocks noGrp="1"/>
+          </p:cNvSpPr>
+          <p:nvPr>
+            <p:ph type="sldNum" sz="quarter" idx="5"/>
+          </p:nvPr>
+        </p:nvSpPr>
+        <p:spPr/>
+        <p:txBody>
+          <a:bodyPr/>
+          <a:lstStyle/>
+          <a:p>
+            <a:fld id="{1840BF9F-FA8F-4CB1-839A-D4536A9CACB4}" type="slidenum">
+              <a:rPr lang="ko-KR" altLang="en-US" smtClean="0"/>
+              <a:t>6</a:t>
+            </a:fld>
+            <a:endParaRPr lang="ko-KR" altLang="en-US"/>
+          </a:p>
+        </p:txBody>
+      </p:sp>
+    </p:spTree>
+    <p:extLst>
+      <p:ext uri="{BB962C8B-B14F-4D97-AF65-F5344CB8AC3E}">
+        <p14:creationId xmlns:p14="http://schemas.microsoft.com/office/powerpoint/2010/main" val="745007668"/>
+      </p:ext>
+    </p:extLst>
+  </p:cSld>
+  <p:clrMapOvr>
+    <a:masterClrMapping/>
+  </p:clrMapOvr>
+</p:notes>
+</file>
+
+<file path=ppt/notesSlides/notesSlide6.xml><?xml version="1.0" encoding="utf-8"?>
+<p:notes xmlns:a="http://schemas.openxmlformats.org/drawingml/2006/main" xmlns:r="http://schemas.openxmlformats.org/officeDocument/2006/relationships" xmlns:p="http://schemas.openxmlformats.org/presentationml/2006/main">
+  <p:cSld>
+    <p:spTree>
+      <p:nvGrpSpPr>
+        <p:cNvPr id="1" name="">
+          <a:extLst>
+            <a:ext uri="{FF2B5EF4-FFF2-40B4-BE49-F238E27FC236}">
+              <a16:creationId xmlns:a16="http://schemas.microsoft.com/office/drawing/2014/main" id="{B6CFBECE-625C-0163-6E50-583930C9C337}"/>
+            </a:ext>
+          </a:extLst>
+        </p:cNvPr>
+        <p:cNvGrpSpPr/>
+        <p:nvPr/>
+      </p:nvGrpSpPr>
+      <p:grpSpPr>
+        <a:xfrm>
+          <a:off x="0" y="0"/>
+          <a:ext cx="0" cy="0"/>
+          <a:chOff x="0" y="0"/>
+          <a:chExt cx="0" cy="0"/>
+        </a:xfrm>
+      </p:grpSpPr>
+      <p:sp>
+        <p:nvSpPr>
+          <p:cNvPr id="2" name="슬라이드 이미지 개체 틀 1">
+            <a:extLst>
+              <a:ext uri="{FF2B5EF4-FFF2-40B4-BE49-F238E27FC236}">
+                <a16:creationId xmlns:a16="http://schemas.microsoft.com/office/drawing/2014/main" id="{9A4A7355-FB64-931A-1385-63939886C06E}"/>
+              </a:ext>
+            </a:extLst>
+          </p:cNvPr>
+          <p:cNvSpPr>
+            <a:spLocks noGrp="1" noRot="1" noChangeAspect="1"/>
+          </p:cNvSpPr>
+          <p:nvPr>
+            <p:ph type="sldImg"/>
+          </p:nvPr>
+        </p:nvSpPr>
+        <p:spPr/>
+      </p:sp>
+      <p:sp>
+        <p:nvSpPr>
+          <p:cNvPr id="3" name="슬라이드 노트 개체 틀 2">
+            <a:extLst>
+              <a:ext uri="{FF2B5EF4-FFF2-40B4-BE49-F238E27FC236}">
+                <a16:creationId xmlns:a16="http://schemas.microsoft.com/office/drawing/2014/main" id="{0EC41141-D2E9-67F3-2CD2-35C4DECE60E1}"/>
+              </a:ext>
+            </a:extLst>
+          </p:cNvPr>
+          <p:cNvSpPr>
+            <a:spLocks noGrp="1"/>
+          </p:cNvSpPr>
+          <p:nvPr>
+            <p:ph type="body" idx="1"/>
+          </p:nvPr>
+        </p:nvSpPr>
+        <p:spPr/>
+        <p:txBody>
+          <a:bodyPr/>
+          <a:lstStyle/>
+          <a:p>
+            <a:endParaRPr lang="ko-KR" altLang="en-US" dirty="0"/>
+          </a:p>
+        </p:txBody>
+      </p:sp>
+      <p:sp>
+        <p:nvSpPr>
+          <p:cNvPr id="4" name="슬라이드 번호 개체 틀 3">
+            <a:extLst>
+              <a:ext uri="{FF2B5EF4-FFF2-40B4-BE49-F238E27FC236}">
+                <a16:creationId xmlns:a16="http://schemas.microsoft.com/office/drawing/2014/main" id="{E6295F6E-617E-83FF-5510-C409ED1DD5C7}"/>
+              </a:ext>
+            </a:extLst>
+          </p:cNvPr>
+          <p:cNvSpPr>
+            <a:spLocks noGrp="1"/>
+          </p:cNvSpPr>
+          <p:nvPr>
+            <p:ph type="sldNum" sz="quarter" idx="5"/>
+          </p:nvPr>
+        </p:nvSpPr>
+        <p:spPr/>
+        <p:txBody>
+          <a:bodyPr/>
+          <a:lstStyle/>
+          <a:p>
+            <a:fld id="{1840BF9F-FA8F-4CB1-839A-D4536A9CACB4}" type="slidenum">
+              <a:rPr lang="ko-KR" altLang="en-US" smtClean="0"/>
+              <a:t>7</a:t>
+            </a:fld>
+            <a:endParaRPr lang="ko-KR" altLang="en-US"/>
+          </a:p>
+        </p:txBody>
+      </p:sp>
+    </p:spTree>
+    <p:extLst>
+      <p:ext uri="{BB962C8B-B14F-4D97-AF65-F5344CB8AC3E}">
+        <p14:creationId xmlns:p14="http://schemas.microsoft.com/office/powerpoint/2010/main" val="3640042164"/>
+      </p:ext>
+    </p:extLst>
+  </p:cSld>
+  <p:clrMapOvr>
+    <a:masterClrMapping/>
+  </p:clrMapOvr>
+</p:notes>
+</file>
+
+<file path=ppt/notesSlides/notesSlide7.xml><?xml version="1.0" encoding="utf-8"?>
+<p:notes xmlns:a="http://schemas.openxmlformats.org/drawingml/2006/main" xmlns:r="http://schemas.openxmlformats.org/officeDocument/2006/relationships" xmlns:p="http://schemas.openxmlformats.org/presentationml/2006/main">
+  <p:cSld>
+    <p:spTree>
+      <p:nvGrpSpPr>
+        <p:cNvPr id="1" name="">
+          <a:extLst>
+            <a:ext uri="{FF2B5EF4-FFF2-40B4-BE49-F238E27FC236}">
+              <a16:creationId xmlns:a16="http://schemas.microsoft.com/office/drawing/2014/main" id="{D173ED78-C12D-0459-9A60-DA111477D69D}"/>
+            </a:ext>
+          </a:extLst>
+        </p:cNvPr>
+        <p:cNvGrpSpPr/>
+        <p:nvPr/>
+      </p:nvGrpSpPr>
+      <p:grpSpPr>
+        <a:xfrm>
+          <a:off x="0" y="0"/>
+          <a:ext cx="0" cy="0"/>
+          <a:chOff x="0" y="0"/>
+          <a:chExt cx="0" cy="0"/>
+        </a:xfrm>
+      </p:grpSpPr>
+      <p:sp>
+        <p:nvSpPr>
+          <p:cNvPr id="2" name="슬라이드 이미지 개체 틀 1">
+            <a:extLst>
+              <a:ext uri="{FF2B5EF4-FFF2-40B4-BE49-F238E27FC236}">
+                <a16:creationId xmlns:a16="http://schemas.microsoft.com/office/drawing/2014/main" id="{4DDBD683-5B5F-FF3B-469F-81ADEBEEA2BE}"/>
+              </a:ext>
+            </a:extLst>
+          </p:cNvPr>
+          <p:cNvSpPr>
+            <a:spLocks noGrp="1" noRot="1" noChangeAspect="1"/>
+          </p:cNvSpPr>
+          <p:nvPr>
+            <p:ph type="sldImg"/>
+          </p:nvPr>
+        </p:nvSpPr>
+        <p:spPr/>
+      </p:sp>
+      <p:sp>
+        <p:nvSpPr>
+          <p:cNvPr id="3" name="슬라이드 노트 개체 틀 2">
+            <a:extLst>
+              <a:ext uri="{FF2B5EF4-FFF2-40B4-BE49-F238E27FC236}">
+                <a16:creationId xmlns:a16="http://schemas.microsoft.com/office/drawing/2014/main" id="{8698C26E-C247-FC97-470E-6D142A52A38B}"/>
+              </a:ext>
+            </a:extLst>
+          </p:cNvPr>
+          <p:cNvSpPr>
+            <a:spLocks noGrp="1"/>
+          </p:cNvSpPr>
+          <p:nvPr>
+            <p:ph type="body" idx="1"/>
+          </p:nvPr>
+        </p:nvSpPr>
+        <p:spPr/>
+        <p:txBody>
+          <a:bodyPr/>
+          <a:lstStyle/>
+          <a:p>
+            <a:endParaRPr lang="ko-KR" altLang="en-US" dirty="0"/>
+          </a:p>
+        </p:txBody>
+      </p:sp>
+      <p:sp>
+        <p:nvSpPr>
+          <p:cNvPr id="4" name="슬라이드 번호 개체 틀 3">
+            <a:extLst>
+              <a:ext uri="{FF2B5EF4-FFF2-40B4-BE49-F238E27FC236}">
+                <a16:creationId xmlns:a16="http://schemas.microsoft.com/office/drawing/2014/main" id="{35DAAACC-0110-DAAF-CE18-8E83C3E1C2E4}"/>
+              </a:ext>
+            </a:extLst>
+          </p:cNvPr>
+          <p:cNvSpPr>
+            <a:spLocks noGrp="1"/>
+          </p:cNvSpPr>
+          <p:nvPr>
+            <p:ph type="sldNum" sz="quarter" idx="5"/>
+          </p:nvPr>
+        </p:nvSpPr>
+        <p:spPr/>
+        <p:txBody>
+          <a:bodyPr/>
+          <a:lstStyle/>
+          <a:p>
+            <a:fld id="{1840BF9F-FA8F-4CB1-839A-D4536A9CACB4}" type="slidenum">
+              <a:rPr lang="ko-KR" altLang="en-US" smtClean="0"/>
+              <a:t>8</a:t>
+            </a:fld>
+            <a:endParaRPr lang="ko-KR" altLang="en-US"/>
+          </a:p>
+        </p:txBody>
+      </p:sp>
+    </p:spTree>
+    <p:extLst>
+      <p:ext uri="{BB962C8B-B14F-4D97-AF65-F5344CB8AC3E}">
+        <p14:creationId xmlns:p14="http://schemas.microsoft.com/office/powerpoint/2010/main" val="3900002770"/>
+      </p:ext>
+    </p:extLst>
+  </p:cSld>
+  <p:clrMapOvr>
+    <a:masterClrMapping/>
+  </p:clrMapOvr>
+</p:notes>
+</file>
+
+<file path=ppt/notesSlides/notesSlide8.xml><?xml version="1.0" encoding="utf-8"?>
+<p:notes xmlns:a="http://schemas.openxmlformats.org/drawingml/2006/main" xmlns:r="http://schemas.openxmlformats.org/officeDocument/2006/relationships" xmlns:p="http://schemas.openxmlformats.org/presentationml/2006/main">
+  <p:cSld>
+    <p:spTree>
+      <p:nvGrpSpPr>
         <p:cNvPr id="1" name=""/>
         <p:cNvGrpSpPr/>
         <p:nvPr/>
@@ -730,7 +1166,7 @@
           <a:p>
             <a:fld id="{1840BF9F-FA8F-4CB1-839A-D4536A9CACB4}" type="slidenum">
               <a:rPr lang="ko-KR" altLang="en-US" smtClean="0"/>
-              <a:t>5</a:t>
+              <a:t>9</a:t>
             </a:fld>
             <a:endParaRPr lang="ko-KR" altLang="en-US"/>
           </a:p>
@@ -898,7 +1334,7 @@
           <a:p>
             <a:fld id="{1D8BD707-D9CF-40AE-B4C6-C98DA3205C09}" type="datetimeFigureOut">
               <a:rPr lang="en-US"/>
-              <a:t>8/5/2026</a:t>
+              <a:t>8/6/2026</a:t>
             </a:fld>
             <a:endParaRPr lang="en-US"/>
           </a:p>
@@ -1073,7 +1509,7 @@
           <a:p>
             <a:fld id="{1D8BD707-D9CF-40AE-B4C6-C98DA3205C09}" type="datetimeFigureOut">
               <a:rPr lang="en-US"/>
-              <a:t>8/5/2026</a:t>
+              <a:t>8/6/2026</a:t>
             </a:fld>
             <a:endParaRPr lang="en-US"/>
           </a:p>
@@ -1287,7 +1723,7 @@
           <a:p>
             <a:fld id="{1D8BD707-D9CF-40AE-B4C6-C98DA3205C09}" type="datetimeFigureOut">
               <a:rPr lang="en-US"/>
-              <a:t>8/5/2026</a:t>
+              <a:t>8/6/2026</a:t>
             </a:fld>
             <a:endParaRPr lang="en-US"/>
           </a:p>
@@ -1435,7 +1871,7 @@
           <a:p>
             <a:fld id="{1D8BD707-D9CF-40AE-B4C6-C98DA3205C09}" type="datetimeFigureOut">
               <a:rPr lang="en-US"/>
-              <a:t>8/5/2026</a:t>
+              <a:t>8/6/2026</a:t>
             </a:fld>
             <a:endParaRPr lang="en-US"/>
           </a:p>
@@ -1554,7 +1990,7 @@
           <a:p>
             <a:fld id="{1D8BD707-D9CF-40AE-B4C6-C98DA3205C09}" type="datetimeFigureOut">
               <a:rPr lang="en-US"/>
-              <a:t>8/5/2026</a:t>
+              <a:t>8/6/2026</a:t>
             </a:fld>
             <a:endParaRPr lang="en-US"/>
           </a:p>
@@ -1777,7 +2213,7 @@
           <a:p>
             <a:fld id="{1D8BD707-D9CF-40AE-B4C6-C98DA3205C09}" type="datetimeFigureOut">
               <a:rPr lang="en-US"/>
-              <a:t>8/5/2026</a:t>
+              <a:t>8/6/2026</a:t>
             </a:fld>
             <a:endParaRPr lang="en-US"/>
           </a:p>
@@ -2437,7 +2873,7 @@
               <a:rPr lang="ko-KR" altLang="en-US" sz="1400" dirty="0">
                 <a:latin typeface="+mn-ea"/>
               </a:rPr>
-              <a:t>도로 데이터 표현 방식 변경</a:t>
+              <a:t>여러 버그 수정 및 튜닝</a:t>
             </a:r>
             <a:endParaRPr lang="en-US" altLang="ko-KR" sz="1400" dirty="0">
               <a:latin typeface="+mn-ea"/>
@@ -2453,31 +2889,9 @@
             </a:pPr>
             <a:r>
               <a:rPr lang="ko-KR" altLang="en-US" sz="1400" dirty="0">
-                <a:latin typeface="Malgun Gothic"/>
-                <a:cs typeface="Malgun Gothic"/>
+                <a:latin typeface="+mn-ea"/>
               </a:rPr>
-              <a:t>주행 플랜 시뮬레이션 </a:t>
-            </a:r>
-            <a:r>
-              <a:rPr lang="en-US" altLang="ko-KR" sz="1400" dirty="0">
-                <a:latin typeface="Malgun Gothic"/>
-                <a:cs typeface="Malgun Gothic"/>
-              </a:rPr>
-              <a:t>(</a:t>
-            </a:r>
-            <a:r>
-              <a:rPr lang="ko-KR" altLang="en-US" sz="1400" dirty="0">
-                <a:latin typeface="Malgun Gothic"/>
-                <a:cs typeface="Malgun Gothic"/>
-              </a:rPr>
-              <a:t>폐기</a:t>
-            </a:r>
-            <a:r>
-              <a:rPr lang="en-US" altLang="ko-KR" sz="1400" dirty="0">
-                <a:latin typeface="Malgun Gothic"/>
-                <a:cs typeface="Malgun Gothic"/>
-              </a:rPr>
-              <a:t>)</a:t>
+              <a:t>주차 재적용</a:t>
             </a:r>
             <a:endParaRPr lang="en-US" altLang="ko-KR" sz="1400" dirty="0">
               <a:latin typeface="+mn-ea"/>
@@ -2495,9 +2909,27 @@
               <a:rPr lang="ko-KR" altLang="en-US" sz="1400" dirty="0">
                 <a:latin typeface="+mn-ea"/>
               </a:rPr>
-              <a:t>장애물 회피</a:t>
+              <a:t>사용자 조작과 상호작용</a:t>
             </a:r>
             <a:endParaRPr lang="en-US" altLang="ko-KR" sz="1400" dirty="0">
+              <a:latin typeface="+mn-ea"/>
+            </a:endParaRPr>
+          </a:p>
+          <a:p>
+            <a:pPr marL="285750" indent="-285750">
+              <a:lnSpc>
+                <a:spcPct val="200000"/>
+              </a:lnSpc>
+              <a:buFont typeface="Arial" panose="020B0604020202020204" pitchFamily="34" charset="0"/>
+              <a:buChar char="•"/>
+            </a:pPr>
+            <a:r>
+              <a:rPr lang="ko-KR" altLang="en-US" sz="1600" dirty="0">
+                <a:latin typeface="+mn-ea"/>
+              </a:rPr>
+              <a:t>추가 작업</a:t>
+            </a:r>
+            <a:endParaRPr lang="en-US" altLang="ko-KR" sz="1600" dirty="0">
               <a:latin typeface="+mn-ea"/>
             </a:endParaRPr>
           </a:p>
@@ -2513,27 +2945,9 @@
               <a:rPr lang="ko-KR" altLang="en-US" sz="1400" dirty="0">
                 <a:latin typeface="+mn-ea"/>
               </a:rPr>
-              <a:t>운전 스타일 파라미터화</a:t>
+              <a:t>차종 추가</a:t>
             </a:r>
             <a:endParaRPr lang="en-US" altLang="ko-KR" sz="1400" dirty="0">
-              <a:latin typeface="+mn-ea"/>
-            </a:endParaRPr>
-          </a:p>
-          <a:p>
-            <a:pPr marL="285750" indent="-285750">
-              <a:lnSpc>
-                <a:spcPct val="200000"/>
-              </a:lnSpc>
-              <a:buFont typeface="Arial" panose="020B0604020202020204" pitchFamily="34" charset="0"/>
-              <a:buChar char="•"/>
-            </a:pPr>
-            <a:r>
-              <a:rPr lang="ko-KR" altLang="en-US" sz="1600" dirty="0">
-                <a:latin typeface="+mn-ea"/>
-              </a:rPr>
-              <a:t>추가 작업</a:t>
-            </a:r>
-            <a:endParaRPr lang="en-US" altLang="ko-KR" sz="1600" dirty="0">
               <a:latin typeface="+mn-ea"/>
             </a:endParaRPr>
           </a:p>
@@ -2545,23 +2959,8 @@
               <a:buFont typeface="Arial" panose="020B0604020202020204" pitchFamily="34" charset="0"/>
               <a:buChar char="•"/>
             </a:pPr>
-            <a:r>
-              <a:rPr lang="en-US" altLang="ko-KR" sz="1400" dirty="0">
-                <a:latin typeface="Malgun Gothic"/>
-                <a:cs typeface="Malgun Gothic"/>
-              </a:rPr>
-              <a:t>OBB </a:t>
-            </a:r>
-            <a:r>
-              <a:rPr lang="ko-KR" altLang="en-US" sz="1400" dirty="0">
-                <a:latin typeface="Malgun Gothic"/>
-                <a:cs typeface="Malgun Gothic"/>
-              </a:rPr>
-              <a:t>최적화</a:t>
-            </a:r>
             <a:endParaRPr lang="en-US" altLang="ko-KR" sz="1400" dirty="0">
-              <a:latin typeface="Malgun Gothic"/>
-              <a:cs typeface="Malgun Gothic"/>
+              <a:latin typeface="+mn-ea"/>
             </a:endParaRPr>
           </a:p>
         </p:txBody>
@@ -2913,7 +3312,11 @@
             </a:r>
             <a:r>
               <a:rPr lang="ko-KR" altLang="en-US" spc="-25" dirty="0"/>
-              <a:t>구조 변경</a:t>
+              <a:t>자율 주행 </a:t>
+            </a:r>
+            <a:r>
+              <a:rPr lang="en-US" altLang="ko-KR" spc="-25" dirty="0"/>
+              <a:t>NPC</a:t>
             </a:r>
             <a:endParaRPr spc="-25" dirty="0"/>
           </a:p>
@@ -2984,7 +3387,7 @@
         <p:spPr>
           <a:xfrm>
             <a:off x="1028700" y="1520351"/>
-            <a:ext cx="10134600" cy="4898200"/>
+            <a:ext cx="10134600" cy="2343655"/>
           </a:xfrm>
           <a:prstGeom prst="rect">
             <a:avLst/>
@@ -3071,53 +3474,11 @@
               <a:buChar char="•"/>
             </a:pPr>
             <a:r>
-              <a:rPr lang="en-US" altLang="ko-KR" sz="1600" dirty="0">
-                <a:latin typeface="+mn-ea"/>
-                <a:cs typeface="Malgun Gothic"/>
-              </a:rPr>
-              <a:t>4</a:t>
-            </a:r>
-            <a:r>
               <a:rPr lang="ko-KR" altLang="en-US" sz="1600" dirty="0">
                 <a:latin typeface="+mn-ea"/>
                 <a:cs typeface="Malgun Gothic"/>
               </a:rPr>
-              <a:t>주차 작업 </a:t>
-            </a:r>
-            <a:r>
-              <a:rPr lang="en-US" altLang="ko-KR" sz="1600" dirty="0">
-                <a:latin typeface="+mn-ea"/>
-                <a:cs typeface="Malgun Gothic"/>
-              </a:rPr>
-              <a:t>(</a:t>
-            </a:r>
-            <a:r>
-              <a:rPr lang="ko-KR" altLang="en-US" sz="1600" dirty="0">
-                <a:latin typeface="+mn-ea"/>
-                <a:cs typeface="Malgun Gothic"/>
-              </a:rPr>
-              <a:t>앞차 추종</a:t>
-            </a:r>
-            <a:r>
-              <a:rPr lang="en-US" altLang="ko-KR" sz="1600" dirty="0">
-                <a:latin typeface="+mn-ea"/>
-                <a:cs typeface="Malgun Gothic"/>
-              </a:rPr>
-              <a:t>, </a:t>
-            </a:r>
-            <a:r>
-              <a:rPr lang="ko-KR" altLang="en-US" sz="1600" dirty="0">
-                <a:latin typeface="+mn-ea"/>
-                <a:cs typeface="Malgun Gothic"/>
-              </a:rPr>
-              <a:t>차선 변경</a:t>
-            </a:r>
-            <a:r>
-              <a:rPr lang="en-US" altLang="ko-KR" sz="1600" dirty="0">
-                <a:latin typeface="+mn-ea"/>
-                <a:cs typeface="Malgun Gothic"/>
-              </a:rPr>
-              <a:t>)</a:t>
+              <a:t>주행</a:t>
             </a:r>
             <a:endParaRPr lang="en-US" altLang="ko-KR" sz="1200" dirty="0">
               <a:latin typeface="Malgun Gothic"/>
@@ -3134,13 +3495,56 @@
             </a:pPr>
             <a:r>
               <a:rPr lang="en-US" altLang="ko-KR" sz="1400" dirty="0"/>
-              <a:t>IDM : </a:t>
+              <a:t>A* </a:t>
             </a:r>
             <a:r>
               <a:rPr lang="ko-KR" altLang="en-US" sz="1400" dirty="0"/>
-              <a:t>앞차와 안전거리를 유지하는 가속도 계산식</a:t>
-            </a:r>
-            <a:endParaRPr lang="en-US" altLang="ko-KR" sz="1400" dirty="0"/>
+              <a:t>로 찾은 경로 따라 목적지까지 주행 </a:t>
+            </a:r>
+            <a:r>
+              <a:rPr lang="en-US" altLang="ko-KR" sz="1400" dirty="0"/>
+              <a:t>(</a:t>
+            </a:r>
+            <a:r>
+              <a:rPr lang="ko-KR" altLang="en-US" sz="1400" dirty="0"/>
+              <a:t>주차 </a:t>
+            </a:r>
+            <a:r>
+              <a:rPr lang="en-US" altLang="ko-KR" sz="1400" dirty="0"/>
+              <a:t>O) </a:t>
+            </a:r>
+            <a:r>
+              <a:rPr lang="ko-KR" altLang="en-US" sz="1400" dirty="0"/>
+              <a:t> </a:t>
+            </a:r>
+            <a:r>
+              <a:rPr lang="en-US" altLang="ko-KR" sz="1400" dirty="0"/>
+              <a:t>/ </a:t>
+            </a:r>
+            <a:r>
+              <a:rPr lang="ko-KR" altLang="en-US" sz="1400" dirty="0" err="1"/>
+              <a:t>랜덤한</a:t>
+            </a:r>
+            <a:r>
+              <a:rPr lang="ko-KR" altLang="en-US" sz="1400" dirty="0"/>
+              <a:t> 도로로 배회 </a:t>
+            </a:r>
+            <a:r>
+              <a:rPr lang="en-US" altLang="ko-KR" sz="1400" dirty="0"/>
+              <a:t>(</a:t>
+            </a:r>
+            <a:r>
+              <a:rPr lang="ko-KR" altLang="en-US" sz="1400" dirty="0"/>
+              <a:t>주차 </a:t>
+            </a:r>
+            <a:r>
+              <a:rPr lang="en-US" altLang="ko-KR" sz="1400" dirty="0"/>
+              <a:t>X) </a:t>
+            </a:r>
+            <a:endParaRPr lang="en-US" altLang="ko-KR" sz="1200" dirty="0">
+              <a:latin typeface="Malgun Gothic"/>
+              <a:cs typeface="Malgun Gothic"/>
+            </a:endParaRPr>
           </a:p>
           <a:p>
             <a:pPr marL="742950" lvl="1" indent="-285750">
@@ -3151,43 +3555,18 @@
               <a:buChar char="•"/>
             </a:pPr>
             <a:r>
-              <a:rPr lang="en-US" altLang="ko-KR" sz="1400" dirty="0">
-                <a:latin typeface="+mn-ea"/>
-                <a:cs typeface="Malgun Gothic"/>
-              </a:rPr>
-              <a:t>MOBIL : </a:t>
-            </a:r>
-            <a:r>
-              <a:rPr lang="ko-KR" altLang="en-US" sz="1400" dirty="0">
-                <a:latin typeface="+mn-ea"/>
-                <a:cs typeface="Malgun Gothic"/>
-              </a:rPr>
-              <a:t>옆차선에 안전하게 끼어들기 위한 판별식</a:t>
-            </a:r>
-            <a:endParaRPr lang="en-US" altLang="ko-KR" sz="1600" dirty="0">
-              <a:latin typeface="+mn-ea"/>
-              <a:cs typeface="Malgun Gothic"/>
-            </a:endParaRPr>
-          </a:p>
-          <a:p>
-            <a:pPr marL="285750" indent="-285750">
-              <a:lnSpc>
-                <a:spcPct val="200000"/>
-              </a:lnSpc>
-              <a:buFont typeface="Arial" panose="020B0604020202020204" pitchFamily="34" charset="0"/>
-              <a:buChar char="•"/>
-            </a:pPr>
-            <a:r>
-              <a:rPr lang="ko-KR" altLang="en-US" sz="1600" dirty="0">
-                <a:latin typeface="+mn-ea"/>
-                <a:cs typeface="Malgun Gothic"/>
-              </a:rPr>
-              <a:t>문제점</a:t>
-            </a:r>
-            <a:endParaRPr lang="en-US" altLang="ko-KR" sz="1200" dirty="0">
-              <a:latin typeface="Malgun Gothic"/>
-              <a:cs typeface="Malgun Gothic"/>
-            </a:endParaRPr>
+              <a:rPr lang="ko-KR" altLang="en-US" sz="1400" dirty="0"/>
+              <a:t>도로 중앙선 </a:t>
+            </a:r>
+            <a:r>
+              <a:rPr lang="en-US" altLang="ko-KR" sz="1400" dirty="0"/>
+              <a:t>+ offset </a:t>
+            </a:r>
+            <a:r>
+              <a:rPr lang="ko-KR" altLang="en-US" sz="1400" dirty="0"/>
+              <a:t>라인을 따라 차선 추종</a:t>
+            </a:r>
+            <a:endParaRPr lang="en-US" altLang="ko-KR" sz="1400" dirty="0"/>
           </a:p>
           <a:p>
             <a:pPr marL="742950" lvl="1" indent="-285750">
@@ -3198,18 +3577,37 @@
               <a:buChar char="•"/>
             </a:pPr>
             <a:r>
+              <a:rPr lang="en-US" altLang="ko-KR" sz="1400" dirty="0"/>
+              <a:t>IDM</a:t>
+            </a:r>
+            <a:r>
               <a:rPr lang="ko-KR" altLang="en-US" sz="1400" dirty="0"/>
-              <a:t>차선에 종속적</a:t>
+              <a:t>을 사용한 속도 조절 </a:t>
+            </a:r>
+            <a:r>
+              <a:rPr lang="en-US" altLang="ko-KR" sz="1400" dirty="0"/>
+              <a:t>(</a:t>
+            </a:r>
+            <a:r>
+              <a:rPr lang="ko-KR" altLang="en-US" sz="1400" dirty="0"/>
+              <a:t>앞차 추종</a:t>
             </a:r>
             <a:r>
               <a:rPr lang="en-US" altLang="ko-KR" sz="1400" dirty="0"/>
               <a:t>, </a:t>
             </a:r>
             <a:r>
+              <a:rPr lang="ko-KR" altLang="en-US" sz="1400" dirty="0" err="1"/>
+              <a:t>커브길</a:t>
+            </a:r>
+            <a:r>
               <a:rPr lang="ko-KR" altLang="en-US" sz="1400" dirty="0"/>
-              <a:t>차선 사이 걸쳐 있는 차가 표현이 안됨</a:t>
-            </a:r>
-            <a:endParaRPr lang="en-US" altLang="ko-KR" sz="1400" dirty="0"/>
+              <a:t> 감속</a:t>
+            </a:r>
+            <a:r>
+              <a:rPr lang="en-US" altLang="ko-KR" sz="1400" dirty="0"/>
+              <a:t>)</a:t>
+            </a:r>
           </a:p>
           <a:p>
             <a:pPr marL="742950" lvl="1" indent="-285750">
@@ -3220,100 +3618,26 @@
               <a:buChar char="•"/>
             </a:pPr>
             <a:r>
-              <a:rPr lang="ko-KR" altLang="en-US" sz="1400" dirty="0"/>
-              <a:t>상태 확장이 어려움</a:t>
-            </a:r>
-            <a:r>
-              <a:rPr lang="en-US" altLang="ko-KR" sz="1400" dirty="0"/>
-              <a:t>, IDM</a:t>
-            </a:r>
-            <a:r>
-              <a:rPr lang="ko-KR" altLang="en-US" sz="1400" dirty="0"/>
-              <a:t>이 행동 결정 </a:t>
-            </a:r>
-            <a:r>
-              <a:rPr lang="en-US" altLang="ko-KR" sz="1400" dirty="0"/>
-              <a:t>(</a:t>
-            </a:r>
-            <a:r>
-              <a:rPr lang="ko-KR" altLang="en-US" sz="1400" dirty="0"/>
-              <a:t>가속</a:t>
-            </a:r>
-            <a:r>
-              <a:rPr lang="en-US" altLang="ko-KR" sz="1400" dirty="0"/>
-              <a:t>, </a:t>
-            </a:r>
-            <a:r>
-              <a:rPr lang="ko-KR" altLang="en-US" sz="1400" dirty="0"/>
-              <a:t>감속 등</a:t>
-            </a:r>
-            <a:r>
-              <a:rPr lang="en-US" altLang="ko-KR" sz="1400" dirty="0"/>
-              <a:t>) + </a:t>
-            </a:r>
-            <a:r>
-              <a:rPr lang="ko-KR" altLang="en-US" sz="1400" dirty="0"/>
-              <a:t>가속도 컨트롤 까지 한번에 함 </a:t>
-            </a:r>
-            <a:endParaRPr lang="en-US" altLang="ko-KR" sz="1400" dirty="0"/>
-          </a:p>
-          <a:p>
-            <a:pPr lvl="1">
-              <a:lnSpc>
-                <a:spcPct val="150000"/>
-              </a:lnSpc>
-            </a:pPr>
-            <a:r>
-              <a:rPr lang="en-US" altLang="ko-KR" sz="1400" dirty="0"/>
-              <a:t>	</a:t>
-            </a:r>
-            <a:r>
-              <a:rPr lang="en-US" altLang="ko-KR" sz="1200" dirty="0">
-                <a:solidFill>
-                  <a:srgbClr val="CF3C1C"/>
-                </a:solidFill>
-              </a:rPr>
-              <a:t>=&gt; IDM + MOBIL </a:t>
-            </a:r>
-            <a:r>
-              <a:rPr lang="ko-KR" altLang="en-US" sz="1200" dirty="0">
-                <a:solidFill>
-                  <a:srgbClr val="CF3C1C"/>
-                </a:solidFill>
-              </a:rPr>
-              <a:t>구조 문제</a:t>
-            </a:r>
-            <a:r>
-              <a:rPr lang="en-US" altLang="ko-KR" sz="1200" dirty="0">
-                <a:solidFill>
-                  <a:srgbClr val="CF3C1C"/>
-                </a:solidFill>
-              </a:rPr>
-              <a:t>??</a:t>
-            </a:r>
-          </a:p>
-          <a:p>
-            <a:pPr marL="285750" indent="-285750">
-              <a:lnSpc>
-                <a:spcPct val="200000"/>
-              </a:lnSpc>
-              <a:buFont typeface="Arial" panose="020B0604020202020204" pitchFamily="34" charset="0"/>
-              <a:buChar char="•"/>
-            </a:pPr>
-            <a:r>
-              <a:rPr lang="ko-KR" altLang="en-US" sz="1600" dirty="0">
-                <a:latin typeface="+mn-ea"/>
+              <a:rPr lang="en-US" altLang="ko-KR" sz="1400" dirty="0">
+                <a:latin typeface="Malgun Gothic"/>
                 <a:cs typeface="Malgun Gothic"/>
               </a:rPr>
-              <a:t>수정 방향</a:t>
-            </a:r>
-            <a:endParaRPr lang="en-US" altLang="ko-KR" sz="1200" dirty="0">
+              <a:t>MOBIL</a:t>
+            </a:r>
+            <a:r>
+              <a:rPr lang="ko-KR" altLang="en-US" sz="1400" dirty="0">
+                <a:latin typeface="Malgun Gothic"/>
+                <a:cs typeface="Malgun Gothic"/>
+              </a:rPr>
+              <a:t>판단을 통한 자연스러운 차선 변경</a:t>
+            </a:r>
+            <a:endParaRPr lang="en-US" altLang="ko-KR" sz="1400" dirty="0">
               <a:latin typeface="Malgun Gothic"/>
               <a:cs typeface="Malgun Gothic"/>
             </a:endParaRPr>
           </a:p>
           <a:p>
-            <a:pPr marL="742950" lvl="1" indent="-285750">
+            <a:pPr marL="1200150" lvl="2" indent="-285750">
               <a:lnSpc>
                 <a:spcPct val="150000"/>
               </a:lnSpc>
@@ -3321,101 +3645,29 @@
               <a:buChar char="•"/>
             </a:pPr>
             <a:r>
-              <a:rPr lang="ko-KR" altLang="en-US" sz="1400" dirty="0"/>
-              <a:t>도로 데이터 표현 방식 변경</a:t>
-            </a:r>
-            <a:endParaRPr lang="en-US" altLang="ko-KR" sz="1400" dirty="0"/>
-          </a:p>
-          <a:p>
-            <a:pPr marL="742950" lvl="1" indent="-285750">
-              <a:lnSpc>
-                <a:spcPct val="150000"/>
-              </a:lnSpc>
-              <a:buFont typeface="Arial" panose="020B0604020202020204" pitchFamily="34" charset="0"/>
-              <a:buChar char="•"/>
-            </a:pPr>
-            <a:r>
-              <a:rPr lang="ko-KR" altLang="en-US" sz="1400" dirty="0"/>
-              <a:t>주행 행동 플랜 평가 </a:t>
-            </a:r>
-            <a:r>
-              <a:rPr lang="en-US" altLang="ko-KR" sz="1400" dirty="0"/>
-              <a:t>(</a:t>
-            </a:r>
-            <a:r>
-              <a:rPr lang="ko-KR" altLang="en-US" sz="1400" dirty="0"/>
-              <a:t>상위</a:t>
-            </a:r>
-            <a:r>
-              <a:rPr lang="en-US" altLang="ko-KR" sz="1400" dirty="0"/>
-              <a:t>)</a:t>
-            </a:r>
-            <a:r>
-              <a:rPr lang="ko-KR" altLang="en-US" sz="1400" dirty="0"/>
+              <a:rPr lang="ko-KR" altLang="en-US" sz="1200" dirty="0" err="1"/>
+              <a:t>길찾기</a:t>
+            </a:r>
+            <a:r>
+              <a:rPr lang="ko-KR" altLang="ko-KR" sz="1200" dirty="0"/>
+              <a:t> 연계</a:t>
+            </a:r>
+            <a:r>
+              <a:rPr lang="en-US" altLang="ko-KR" sz="1200" dirty="0"/>
               <a:t> </a:t>
             </a:r>
             <a:r>
-              <a:rPr lang="en-US" altLang="ko-KR" sz="1400" dirty="0"/>
-              <a:t>+</a:t>
-            </a:r>
-            <a:r>
-              <a:rPr lang="ko-KR" altLang="en-US" sz="1400" dirty="0"/>
-              <a:t> </a:t>
-            </a:r>
-            <a:r>
-              <a:rPr lang="en-US" altLang="ko-KR" sz="1400" dirty="0"/>
-              <a:t>PID</a:t>
-            </a:r>
-            <a:r>
-              <a:rPr lang="ko-KR" altLang="en-US" sz="1400" dirty="0"/>
-              <a:t>컨트롤러 </a:t>
-            </a:r>
-            <a:r>
-              <a:rPr lang="en-US" altLang="ko-KR" sz="1400" dirty="0"/>
-              <a:t>(</a:t>
-            </a:r>
-            <a:r>
-              <a:rPr lang="ko-KR" altLang="en-US" sz="1400" dirty="0"/>
-              <a:t>하위</a:t>
-            </a:r>
-            <a:r>
-              <a:rPr lang="en-US" altLang="ko-KR" sz="1400" dirty="0"/>
-              <a:t>)</a:t>
-            </a:r>
-          </a:p>
-          <a:p>
-            <a:pPr marL="742950" lvl="1" indent="-285750">
-              <a:lnSpc>
-                <a:spcPct val="150000"/>
-              </a:lnSpc>
-              <a:buFont typeface="Arial" panose="020B0604020202020204" pitchFamily="34" charset="0"/>
-              <a:buChar char="•"/>
-            </a:pPr>
-            <a:endParaRPr lang="en-US" altLang="ko-KR" sz="1200" dirty="0"/>
-          </a:p>
-          <a:p>
-            <a:pPr marL="742950" lvl="1" indent="-285750">
-              <a:lnSpc>
-                <a:spcPct val="150000"/>
-              </a:lnSpc>
-              <a:buFont typeface="Arial" panose="020B0604020202020204" pitchFamily="34" charset="0"/>
-              <a:buChar char="•"/>
-            </a:pPr>
+              <a:rPr lang="ko-KR" altLang="ko-KR" sz="1200" dirty="0"/>
+              <a:t>: 교차로에 접근할수록 차선 변경 가중치 상향 조정</a:t>
+            </a:r>
+            <a:r>
+              <a:rPr lang="ko-KR" altLang="ko-KR" sz="1200" dirty="0">
+                <a:latin typeface="+mn-ea"/>
+              </a:rPr>
+              <a:t>↑</a:t>
+            </a:r>
             <a:endParaRPr lang="en-US" altLang="ko-KR" sz="1200" dirty="0">
-              <a:latin typeface="Malgun Gothic"/>
-              <a:cs typeface="Malgun Gothic"/>
-            </a:endParaRPr>
-          </a:p>
-          <a:p>
-            <a:pPr marL="742950" lvl="1" indent="-285750">
-              <a:lnSpc>
-                <a:spcPct val="150000"/>
-              </a:lnSpc>
-              <a:buFont typeface="Arial" panose="020B0604020202020204" pitchFamily="34" charset="0"/>
-              <a:buChar char="•"/>
-            </a:pPr>
-            <a:endParaRPr lang="en-US" altLang="ko-KR" sz="1200" dirty="0">
-              <a:latin typeface="Malgun Gothic"/>
+              <a:latin typeface="+mn-ea"/>
               <a:cs typeface="Malgun Gothic"/>
             </a:endParaRPr>
           </a:p>
@@ -3447,6 +3699,1403 @@
 </file>
 
 <file path=ppt/slides/slide5.xml><?xml version="1.0" encoding="utf-8"?>
+<p:sld xmlns:a="http://schemas.openxmlformats.org/drawingml/2006/main" xmlns:r="http://schemas.openxmlformats.org/officeDocument/2006/relationships" xmlns:p="http://schemas.openxmlformats.org/presentationml/2006/main">
+  <p:cSld>
+    <p:spTree>
+      <p:nvGrpSpPr>
+        <p:cNvPr id="1" name="">
+          <a:extLst>
+            <a:ext uri="{FF2B5EF4-FFF2-40B4-BE49-F238E27FC236}">
+              <a16:creationId xmlns:a16="http://schemas.microsoft.com/office/drawing/2014/main" id="{D333805E-1AFA-C094-178E-E9602057ABCE}"/>
+            </a:ext>
+          </a:extLst>
+        </p:cNvPr>
+        <p:cNvGrpSpPr/>
+        <p:nvPr/>
+      </p:nvGrpSpPr>
+      <p:grpSpPr>
+        <a:xfrm>
+          <a:off x="0" y="0"/>
+          <a:ext cx="0" cy="0"/>
+          <a:chOff x="0" y="0"/>
+          <a:chExt cx="0" cy="0"/>
+        </a:xfrm>
+      </p:grpSpPr>
+      <p:sp>
+        <p:nvSpPr>
+          <p:cNvPr id="2" name="object 2" descr="$PPTXTitle">
+            <a:extLst>
+              <a:ext uri="{FF2B5EF4-FFF2-40B4-BE49-F238E27FC236}">
+                <a16:creationId xmlns:a16="http://schemas.microsoft.com/office/drawing/2014/main" id="{8626BCF0-2DB9-D486-741D-F95705276C09}"/>
+              </a:ext>
+            </a:extLst>
+          </p:cNvPr>
+          <p:cNvSpPr txBox="1">
+            <a:spLocks noGrp="1"/>
+          </p:cNvSpPr>
+          <p:nvPr>
+            <p:ph type="title"/>
+          </p:nvPr>
+        </p:nvSpPr>
+        <p:spPr>
+          <a:prstGeom prst="rect">
+            <a:avLst/>
+          </a:prstGeom>
+        </p:spPr>
+        <p:txBody>
+          <a:bodyPr vert="horz" wrap="square" lIns="0" tIns="12065" rIns="0" bIns="0" rtlCol="0">
+            <a:spAutoFit/>
+          </a:bodyPr>
+          <a:lstStyle/>
+          <a:p>
+            <a:pPr marL="12700">
+              <a:lnSpc>
+                <a:spcPct val="100000"/>
+              </a:lnSpc>
+              <a:spcBef>
+                <a:spcPts val="95"/>
+              </a:spcBef>
+            </a:pPr>
+            <a:r>
+              <a:rPr lang="ko-KR" altLang="en-US" spc="-25" dirty="0"/>
+              <a:t>작업내용 </a:t>
+            </a:r>
+            <a:r>
+              <a:rPr lang="en-US" altLang="ko-KR" spc="-25" dirty="0"/>
+              <a:t>– </a:t>
+            </a:r>
+            <a:r>
+              <a:rPr lang="ko-KR" altLang="en-US" spc="-25" dirty="0"/>
+              <a:t>자율 주행 </a:t>
+            </a:r>
+            <a:r>
+              <a:rPr lang="en-US" altLang="ko-KR" spc="-25" dirty="0"/>
+              <a:t>NPC</a:t>
+            </a:r>
+            <a:endParaRPr spc="-25" dirty="0"/>
+          </a:p>
+        </p:txBody>
+      </p:sp>
+      <p:sp>
+        <p:nvSpPr>
+          <p:cNvPr id="4" name="object 4">
+            <a:extLst>
+              <a:ext uri="{FF2B5EF4-FFF2-40B4-BE49-F238E27FC236}">
+                <a16:creationId xmlns:a16="http://schemas.microsoft.com/office/drawing/2014/main" id="{185BDD1D-C3FF-5D25-74C9-F85C4B392850}"/>
+              </a:ext>
+            </a:extLst>
+          </p:cNvPr>
+          <p:cNvSpPr/>
+          <p:nvPr/>
+        </p:nvSpPr>
+        <p:spPr>
+          <a:xfrm>
+            <a:off x="838200" y="1311910"/>
+            <a:ext cx="10515600" cy="0"/>
+          </a:xfrm>
+          <a:custGeom>
+            <a:avLst/>
+            <a:gdLst/>
+            <a:ahLst/>
+            <a:cxnLst/>
+            <a:rect l="l" t="t" r="r" b="b"/>
+            <a:pathLst>
+              <a:path w="10515600">
+                <a:moveTo>
+                  <a:pt x="0" y="0"/>
+                </a:moveTo>
+                <a:lnTo>
+                  <a:pt x="10515600" y="0"/>
+                </a:lnTo>
+              </a:path>
+            </a:pathLst>
+          </a:custGeom>
+          <a:ln w="28575">
+            <a:solidFill>
+              <a:srgbClr val="CF3C1C"/>
+            </a:solidFill>
+          </a:ln>
+        </p:spPr>
+        <p:txBody>
+          <a:bodyPr wrap="square" lIns="0" tIns="0" rIns="0" bIns="0" rtlCol="0"/>
+          <a:lstStyle/>
+          <a:p>
+            <a:endParaRPr/>
+          </a:p>
+        </p:txBody>
+      </p:sp>
+      <p:sp>
+        <p:nvSpPr>
+          <p:cNvPr id="7" name="내용 개체 틀 2">
+            <a:extLst>
+              <a:ext uri="{FF2B5EF4-FFF2-40B4-BE49-F238E27FC236}">
+                <a16:creationId xmlns:a16="http://schemas.microsoft.com/office/drawing/2014/main" id="{740AB12A-D756-8739-5087-5ACA7490BE7E}"/>
+              </a:ext>
+            </a:extLst>
+          </p:cNvPr>
+          <p:cNvSpPr txBox="1">
+            <a:spLocks/>
+          </p:cNvSpPr>
+          <p:nvPr/>
+        </p:nvSpPr>
+        <p:spPr>
+          <a:xfrm>
+            <a:off x="1028700" y="1520351"/>
+            <a:ext cx="10134600" cy="2297488"/>
+          </a:xfrm>
+          <a:prstGeom prst="rect">
+            <a:avLst/>
+          </a:prstGeom>
+        </p:spPr>
+        <p:txBody>
+          <a:bodyPr wrap="square" lIns="0" tIns="0" rIns="0" bIns="0">
+            <a:spAutoFit/>
+          </a:bodyPr>
+          <a:lstStyle>
+            <a:lvl1pPr marL="0">
+              <a:defRPr b="0" i="0">
+                <a:solidFill>
+                  <a:schemeClr val="tx1"/>
+                </a:solidFill>
+                <a:latin typeface="+mn-lt"/>
+                <a:ea typeface="+mn-ea"/>
+                <a:cs typeface="+mn-cs"/>
+              </a:defRPr>
+            </a:lvl1pPr>
+            <a:lvl2pPr marL="457200">
+              <a:defRPr>
+                <a:latin typeface="+mn-lt"/>
+                <a:ea typeface="+mn-ea"/>
+                <a:cs typeface="+mn-cs"/>
+              </a:defRPr>
+            </a:lvl2pPr>
+            <a:lvl3pPr marL="914400">
+              <a:defRPr>
+                <a:latin typeface="+mn-lt"/>
+                <a:ea typeface="+mn-ea"/>
+                <a:cs typeface="+mn-cs"/>
+              </a:defRPr>
+            </a:lvl3pPr>
+            <a:lvl4pPr marL="1371600">
+              <a:defRPr>
+                <a:latin typeface="+mn-lt"/>
+                <a:ea typeface="+mn-ea"/>
+                <a:cs typeface="+mn-cs"/>
+              </a:defRPr>
+            </a:lvl4pPr>
+            <a:lvl5pPr marL="1828800">
+              <a:defRPr>
+                <a:latin typeface="+mn-lt"/>
+                <a:ea typeface="+mn-ea"/>
+                <a:cs typeface="+mn-cs"/>
+              </a:defRPr>
+            </a:lvl5pPr>
+            <a:lvl6pPr marL="2286000">
+              <a:defRPr>
+                <a:latin typeface="+mn-lt"/>
+                <a:ea typeface="+mn-ea"/>
+                <a:cs typeface="+mn-cs"/>
+              </a:defRPr>
+            </a:lvl6pPr>
+            <a:lvl7pPr marL="2743200">
+              <a:defRPr>
+                <a:latin typeface="+mn-lt"/>
+                <a:ea typeface="+mn-ea"/>
+                <a:cs typeface="+mn-cs"/>
+              </a:defRPr>
+            </a:lvl7pPr>
+            <a:lvl8pPr marL="3200400">
+              <a:defRPr>
+                <a:latin typeface="+mn-lt"/>
+                <a:ea typeface="+mn-ea"/>
+                <a:cs typeface="+mn-cs"/>
+              </a:defRPr>
+            </a:lvl8pPr>
+            <a:lvl9pPr marL="3657600">
+              <a:defRPr>
+                <a:latin typeface="+mn-lt"/>
+                <a:ea typeface="+mn-ea"/>
+                <a:cs typeface="+mn-cs"/>
+              </a:defRPr>
+            </a:lvl9pPr>
+          </a:lstStyle>
+          <a:p>
+            <a:pPr marL="285750" indent="-285750">
+              <a:lnSpc>
+                <a:spcPct val="200000"/>
+              </a:lnSpc>
+              <a:buFont typeface="Arial" panose="020B0604020202020204" pitchFamily="34" charset="0"/>
+              <a:buChar char="•"/>
+            </a:pPr>
+            <a:r>
+              <a:rPr lang="ko-KR" altLang="en-US" sz="1600" dirty="0">
+                <a:latin typeface="+mn-ea"/>
+                <a:cs typeface="Malgun Gothic"/>
+              </a:rPr>
+              <a:t>신호 및 교차로</a:t>
+            </a:r>
+            <a:endParaRPr lang="en-US" altLang="ko-KR" sz="1200" dirty="0">
+              <a:latin typeface="Malgun Gothic"/>
+              <a:cs typeface="Malgun Gothic"/>
+            </a:endParaRPr>
+          </a:p>
+          <a:p>
+            <a:pPr marL="742950" lvl="1" indent="-285750">
+              <a:lnSpc>
+                <a:spcPct val="150000"/>
+              </a:lnSpc>
+              <a:buFont typeface="Arial" panose="020B0604020202020204" pitchFamily="34" charset="0"/>
+              <a:buChar char="•"/>
+            </a:pPr>
+            <a:r>
+              <a:rPr lang="ko-KR" altLang="en-US" sz="1400" dirty="0">
+                <a:latin typeface="+mn-ea"/>
+              </a:rPr>
+              <a:t>좌회전</a:t>
+            </a:r>
+            <a:r>
+              <a:rPr lang="en-US" altLang="ko-KR" sz="1400" dirty="0">
+                <a:latin typeface="+mn-ea"/>
+              </a:rPr>
+              <a:t>, </a:t>
+            </a:r>
+            <a:r>
+              <a:rPr lang="ko-KR" altLang="en-US" sz="1400" dirty="0">
+                <a:latin typeface="+mn-ea"/>
+              </a:rPr>
+              <a:t>직진에만 신호 적용 </a:t>
+            </a:r>
+            <a:r>
+              <a:rPr lang="en-US" altLang="ko-KR" sz="1400" dirty="0">
+                <a:latin typeface="+mn-ea"/>
+              </a:rPr>
+              <a:t>/ </a:t>
+            </a:r>
+            <a:r>
+              <a:rPr lang="ko-KR" altLang="en-US" sz="1400" dirty="0">
+                <a:latin typeface="+mn-ea"/>
+              </a:rPr>
+              <a:t>우회전은 항상 주행 가능</a:t>
+            </a:r>
+            <a:endParaRPr lang="en-US" altLang="ko-KR" sz="1400" dirty="0">
+              <a:latin typeface="+mn-ea"/>
+            </a:endParaRPr>
+          </a:p>
+          <a:p>
+            <a:pPr marL="742950" lvl="1" indent="-285750">
+              <a:lnSpc>
+                <a:spcPct val="150000"/>
+              </a:lnSpc>
+              <a:buFont typeface="Arial" panose="020B0604020202020204" pitchFamily="34" charset="0"/>
+              <a:buChar char="•"/>
+            </a:pPr>
+            <a:r>
+              <a:rPr lang="ko-KR" altLang="en-US" sz="1400" dirty="0">
+                <a:latin typeface="+mn-ea"/>
+              </a:rPr>
+              <a:t>교차로 진입 시 교차로를 예약하여 충돌이 발생하지 않도록 함</a:t>
+            </a:r>
+            <a:endParaRPr lang="en-US" altLang="ko-KR" sz="1400" dirty="0">
+              <a:latin typeface="+mn-ea"/>
+            </a:endParaRPr>
+          </a:p>
+          <a:p>
+            <a:pPr marL="1200150" lvl="2" indent="-285750">
+              <a:lnSpc>
+                <a:spcPct val="150000"/>
+              </a:lnSpc>
+              <a:buFont typeface="Arial" panose="020B0604020202020204" pitchFamily="34" charset="0"/>
+              <a:buChar char="•"/>
+            </a:pPr>
+            <a:r>
+              <a:rPr lang="ko-KR" altLang="en-US" sz="1200" dirty="0">
+                <a:latin typeface="+mn-ea"/>
+              </a:rPr>
+              <a:t>같은 도로 차량은 함께 진입할 수 있고</a:t>
+            </a:r>
+            <a:r>
+              <a:rPr lang="en-US" altLang="ko-KR" sz="1200" dirty="0">
+                <a:latin typeface="+mn-ea"/>
+              </a:rPr>
+              <a:t>, </a:t>
+            </a:r>
+            <a:r>
+              <a:rPr lang="ko-KR" altLang="en-US" sz="1200" dirty="0">
+                <a:latin typeface="+mn-ea"/>
+              </a:rPr>
+              <a:t>다른 도로 차량은 교차로 예약 상태 확인 후 대기</a:t>
+            </a:r>
+            <a:endParaRPr lang="en-US" altLang="ko-KR" sz="1200" dirty="0">
+              <a:latin typeface="+mn-ea"/>
+            </a:endParaRPr>
+          </a:p>
+          <a:p>
+            <a:pPr marL="742950" lvl="1" indent="-285750">
+              <a:lnSpc>
+                <a:spcPct val="150000"/>
+              </a:lnSpc>
+              <a:buFont typeface="Arial" panose="020B0604020202020204" pitchFamily="34" charset="0"/>
+              <a:buChar char="•"/>
+            </a:pPr>
+            <a:r>
+              <a:rPr lang="ko-KR" altLang="en-US" sz="1400" dirty="0">
+                <a:latin typeface="+mn-ea"/>
+              </a:rPr>
+              <a:t>양보 우선순위를 적용하여 </a:t>
+            </a:r>
+            <a:r>
+              <a:rPr lang="ko-KR" altLang="en-US" sz="1400" dirty="0" err="1">
+                <a:latin typeface="+mn-ea"/>
+              </a:rPr>
+              <a:t>데드락</a:t>
+            </a:r>
+            <a:r>
+              <a:rPr lang="ko-KR" altLang="en-US" sz="1400" dirty="0">
+                <a:latin typeface="+mn-ea"/>
+              </a:rPr>
+              <a:t> 발생을 방지하고 발생시 타임아웃과 회피 상태로 전환</a:t>
+            </a:r>
+            <a:endParaRPr lang="en-US" altLang="ko-KR" sz="1400" dirty="0">
+              <a:latin typeface="+mn-ea"/>
+            </a:endParaRPr>
+          </a:p>
+          <a:p>
+            <a:pPr marL="1200150" lvl="2" indent="-285750">
+              <a:lnSpc>
+                <a:spcPct val="150000"/>
+              </a:lnSpc>
+              <a:buFont typeface="Arial" panose="020B0604020202020204" pitchFamily="34" charset="0"/>
+              <a:buChar char="•"/>
+            </a:pPr>
+            <a:r>
+              <a:rPr lang="ko-KR" altLang="en-US" sz="1200" dirty="0">
+                <a:latin typeface="+mn-ea"/>
+              </a:rPr>
+              <a:t>직진 </a:t>
+            </a:r>
+            <a:r>
+              <a:rPr lang="en-US" altLang="ko-KR" sz="1200" dirty="0">
+                <a:latin typeface="+mn-ea"/>
+              </a:rPr>
+              <a:t>&gt; </a:t>
+            </a:r>
+            <a:r>
+              <a:rPr lang="ko-KR" altLang="en-US" sz="1200" dirty="0">
+                <a:latin typeface="+mn-ea"/>
+              </a:rPr>
+              <a:t>좌회전</a:t>
+            </a:r>
+            <a:r>
+              <a:rPr lang="en-US" altLang="ko-KR" sz="1200" dirty="0">
+                <a:latin typeface="+mn-ea"/>
+              </a:rPr>
+              <a:t> </a:t>
+            </a:r>
+            <a:r>
+              <a:rPr lang="ko-KR" altLang="en-US" sz="1200" dirty="0">
+                <a:latin typeface="+mn-ea"/>
+              </a:rPr>
+              <a:t>안되면 </a:t>
+            </a:r>
+            <a:r>
+              <a:rPr lang="en-US" altLang="ko-KR" sz="1200" dirty="0">
+                <a:latin typeface="+mn-ea"/>
+              </a:rPr>
+              <a:t>ID </a:t>
+            </a:r>
+            <a:r>
+              <a:rPr lang="ko-KR" altLang="en-US" sz="1200" dirty="0">
+                <a:latin typeface="+mn-ea"/>
+              </a:rPr>
+              <a:t>비교</a:t>
+            </a:r>
+            <a:endParaRPr lang="en-US" altLang="ko-KR" sz="1400" dirty="0">
+              <a:latin typeface="+mn-ea"/>
+            </a:endParaRPr>
+          </a:p>
+          <a:p>
+            <a:pPr marL="742950" lvl="1" indent="-285750">
+              <a:lnSpc>
+                <a:spcPct val="150000"/>
+              </a:lnSpc>
+              <a:buFont typeface="Arial" panose="020B0604020202020204" pitchFamily="34" charset="0"/>
+              <a:buChar char="•"/>
+            </a:pPr>
+            <a:endParaRPr lang="en-US" altLang="ko-KR" sz="1400" dirty="0">
+              <a:latin typeface="+mn-ea"/>
+            </a:endParaRPr>
+          </a:p>
+        </p:txBody>
+      </p:sp>
+    </p:spTree>
+    <p:extLst>
+      <p:ext uri="{BB962C8B-B14F-4D97-AF65-F5344CB8AC3E}">
+        <p14:creationId xmlns:p14="http://schemas.microsoft.com/office/powerpoint/2010/main" val="3698026695"/>
+      </p:ext>
+    </p:extLst>
+  </p:cSld>
+  <p:clrMapOvr>
+    <a:masterClrMapping/>
+  </p:clrMapOvr>
+</p:sld>
+</file>
+
+<file path=ppt/slides/slide6.xml><?xml version="1.0" encoding="utf-8"?>
+<p:sld xmlns:a="http://schemas.openxmlformats.org/drawingml/2006/main" xmlns:r="http://schemas.openxmlformats.org/officeDocument/2006/relationships" xmlns:p="http://schemas.openxmlformats.org/presentationml/2006/main">
+  <p:cSld>
+    <p:spTree>
+      <p:nvGrpSpPr>
+        <p:cNvPr id="1" name="">
+          <a:extLst>
+            <a:ext uri="{FF2B5EF4-FFF2-40B4-BE49-F238E27FC236}">
+              <a16:creationId xmlns:a16="http://schemas.microsoft.com/office/drawing/2014/main" id="{ED412F75-5C44-A335-7664-562389F8ADDF}"/>
+            </a:ext>
+          </a:extLst>
+        </p:cNvPr>
+        <p:cNvGrpSpPr/>
+        <p:nvPr/>
+      </p:nvGrpSpPr>
+      <p:grpSpPr>
+        <a:xfrm>
+          <a:off x="0" y="0"/>
+          <a:ext cx="0" cy="0"/>
+          <a:chOff x="0" y="0"/>
+          <a:chExt cx="0" cy="0"/>
+        </a:xfrm>
+      </p:grpSpPr>
+      <p:sp>
+        <p:nvSpPr>
+          <p:cNvPr id="2" name="object 2" descr="$PPTXTitle">
+            <a:extLst>
+              <a:ext uri="{FF2B5EF4-FFF2-40B4-BE49-F238E27FC236}">
+                <a16:creationId xmlns:a16="http://schemas.microsoft.com/office/drawing/2014/main" id="{14ADBFA6-3797-3502-8A9C-2EFCAC6EDD20}"/>
+              </a:ext>
+            </a:extLst>
+          </p:cNvPr>
+          <p:cNvSpPr txBox="1">
+            <a:spLocks noGrp="1"/>
+          </p:cNvSpPr>
+          <p:nvPr>
+            <p:ph type="title"/>
+          </p:nvPr>
+        </p:nvSpPr>
+        <p:spPr>
+          <a:prstGeom prst="rect">
+            <a:avLst/>
+          </a:prstGeom>
+        </p:spPr>
+        <p:txBody>
+          <a:bodyPr vert="horz" wrap="square" lIns="0" tIns="12065" rIns="0" bIns="0" rtlCol="0">
+            <a:spAutoFit/>
+          </a:bodyPr>
+          <a:lstStyle/>
+          <a:p>
+            <a:pPr marL="12700">
+              <a:lnSpc>
+                <a:spcPct val="100000"/>
+              </a:lnSpc>
+              <a:spcBef>
+                <a:spcPts val="95"/>
+              </a:spcBef>
+            </a:pPr>
+            <a:r>
+              <a:rPr lang="ko-KR" altLang="en-US" spc="-25" dirty="0"/>
+              <a:t>작업내용 </a:t>
+            </a:r>
+            <a:r>
+              <a:rPr lang="en-US" altLang="ko-KR" spc="-25" dirty="0"/>
+              <a:t>– </a:t>
+            </a:r>
+            <a:r>
+              <a:rPr lang="ko-KR" altLang="en-US" spc="-25" dirty="0"/>
+              <a:t>자율 주행 </a:t>
+            </a:r>
+            <a:r>
+              <a:rPr lang="en-US" altLang="ko-KR" spc="-25" dirty="0"/>
+              <a:t>NPC</a:t>
+            </a:r>
+            <a:endParaRPr spc="-25" dirty="0"/>
+          </a:p>
+        </p:txBody>
+      </p:sp>
+      <p:sp>
+        <p:nvSpPr>
+          <p:cNvPr id="4" name="object 4">
+            <a:extLst>
+              <a:ext uri="{FF2B5EF4-FFF2-40B4-BE49-F238E27FC236}">
+                <a16:creationId xmlns:a16="http://schemas.microsoft.com/office/drawing/2014/main" id="{2394929B-0586-6353-9359-B62D8F955EE4}"/>
+              </a:ext>
+            </a:extLst>
+          </p:cNvPr>
+          <p:cNvSpPr/>
+          <p:nvPr/>
+        </p:nvSpPr>
+        <p:spPr>
+          <a:xfrm>
+            <a:off x="838200" y="1311910"/>
+            <a:ext cx="10515600" cy="0"/>
+          </a:xfrm>
+          <a:custGeom>
+            <a:avLst/>
+            <a:gdLst/>
+            <a:ahLst/>
+            <a:cxnLst/>
+            <a:rect l="l" t="t" r="r" b="b"/>
+            <a:pathLst>
+              <a:path w="10515600">
+                <a:moveTo>
+                  <a:pt x="0" y="0"/>
+                </a:moveTo>
+                <a:lnTo>
+                  <a:pt x="10515600" y="0"/>
+                </a:lnTo>
+              </a:path>
+            </a:pathLst>
+          </a:custGeom>
+          <a:ln w="28575">
+            <a:solidFill>
+              <a:srgbClr val="CF3C1C"/>
+            </a:solidFill>
+          </a:ln>
+        </p:spPr>
+        <p:txBody>
+          <a:bodyPr wrap="square" lIns="0" tIns="0" rIns="0" bIns="0" rtlCol="0"/>
+          <a:lstStyle/>
+          <a:p>
+            <a:endParaRPr/>
+          </a:p>
+        </p:txBody>
+      </p:sp>
+      <p:sp>
+        <p:nvSpPr>
+          <p:cNvPr id="7" name="내용 개체 틀 2">
+            <a:extLst>
+              <a:ext uri="{FF2B5EF4-FFF2-40B4-BE49-F238E27FC236}">
+                <a16:creationId xmlns:a16="http://schemas.microsoft.com/office/drawing/2014/main" id="{690CB467-0D05-BCE9-BBF7-87CABF4E8EA8}"/>
+              </a:ext>
+            </a:extLst>
+          </p:cNvPr>
+          <p:cNvSpPr txBox="1">
+            <a:spLocks/>
+          </p:cNvSpPr>
+          <p:nvPr/>
+        </p:nvSpPr>
+        <p:spPr>
+          <a:xfrm>
+            <a:off x="1028700" y="1520351"/>
+            <a:ext cx="10134600" cy="773994"/>
+          </a:xfrm>
+          <a:prstGeom prst="rect">
+            <a:avLst/>
+          </a:prstGeom>
+        </p:spPr>
+        <p:txBody>
+          <a:bodyPr wrap="square" lIns="0" tIns="0" rIns="0" bIns="0">
+            <a:spAutoFit/>
+          </a:bodyPr>
+          <a:lstStyle>
+            <a:lvl1pPr marL="0">
+              <a:defRPr b="0" i="0">
+                <a:solidFill>
+                  <a:schemeClr val="tx1"/>
+                </a:solidFill>
+                <a:latin typeface="+mn-lt"/>
+                <a:ea typeface="+mn-ea"/>
+                <a:cs typeface="+mn-cs"/>
+              </a:defRPr>
+            </a:lvl1pPr>
+            <a:lvl2pPr marL="457200">
+              <a:defRPr>
+                <a:latin typeface="+mn-lt"/>
+                <a:ea typeface="+mn-ea"/>
+                <a:cs typeface="+mn-cs"/>
+              </a:defRPr>
+            </a:lvl2pPr>
+            <a:lvl3pPr marL="914400">
+              <a:defRPr>
+                <a:latin typeface="+mn-lt"/>
+                <a:ea typeface="+mn-ea"/>
+                <a:cs typeface="+mn-cs"/>
+              </a:defRPr>
+            </a:lvl3pPr>
+            <a:lvl4pPr marL="1371600">
+              <a:defRPr>
+                <a:latin typeface="+mn-lt"/>
+                <a:ea typeface="+mn-ea"/>
+                <a:cs typeface="+mn-cs"/>
+              </a:defRPr>
+            </a:lvl4pPr>
+            <a:lvl5pPr marL="1828800">
+              <a:defRPr>
+                <a:latin typeface="+mn-lt"/>
+                <a:ea typeface="+mn-ea"/>
+                <a:cs typeface="+mn-cs"/>
+              </a:defRPr>
+            </a:lvl5pPr>
+            <a:lvl6pPr marL="2286000">
+              <a:defRPr>
+                <a:latin typeface="+mn-lt"/>
+                <a:ea typeface="+mn-ea"/>
+                <a:cs typeface="+mn-cs"/>
+              </a:defRPr>
+            </a:lvl6pPr>
+            <a:lvl7pPr marL="2743200">
+              <a:defRPr>
+                <a:latin typeface="+mn-lt"/>
+                <a:ea typeface="+mn-ea"/>
+                <a:cs typeface="+mn-cs"/>
+              </a:defRPr>
+            </a:lvl7pPr>
+            <a:lvl8pPr marL="3200400">
+              <a:defRPr>
+                <a:latin typeface="+mn-lt"/>
+                <a:ea typeface="+mn-ea"/>
+                <a:cs typeface="+mn-cs"/>
+              </a:defRPr>
+            </a:lvl8pPr>
+            <a:lvl9pPr marL="3657600">
+              <a:defRPr>
+                <a:latin typeface="+mn-lt"/>
+                <a:ea typeface="+mn-ea"/>
+                <a:cs typeface="+mn-cs"/>
+              </a:defRPr>
+            </a:lvl9pPr>
+          </a:lstStyle>
+          <a:p>
+            <a:pPr marL="285750" indent="-285750">
+              <a:lnSpc>
+                <a:spcPct val="200000"/>
+              </a:lnSpc>
+              <a:buFont typeface="Arial" panose="020B0604020202020204" pitchFamily="34" charset="0"/>
+              <a:buChar char="•"/>
+            </a:pPr>
+            <a:r>
+              <a:rPr lang="en-US" altLang="ko-KR" sz="1600" dirty="0">
+                <a:latin typeface="+mn-ea"/>
+                <a:cs typeface="Malgun Gothic"/>
+              </a:rPr>
+              <a:t> </a:t>
+            </a:r>
+            <a:r>
+              <a:rPr lang="ko-KR" altLang="en-US" sz="1600" dirty="0">
+                <a:latin typeface="+mn-ea"/>
+                <a:cs typeface="Malgun Gothic"/>
+              </a:rPr>
+              <a:t>장애물 회피</a:t>
+            </a:r>
+            <a:endParaRPr lang="en-US" altLang="ko-KR" sz="1200" dirty="0">
+              <a:latin typeface="Malgun Gothic"/>
+              <a:cs typeface="Malgun Gothic"/>
+            </a:endParaRPr>
+          </a:p>
+          <a:p>
+            <a:pPr marL="742950" lvl="1" indent="-285750">
+              <a:lnSpc>
+                <a:spcPct val="150000"/>
+              </a:lnSpc>
+              <a:buFont typeface="Arial" panose="020B0604020202020204" pitchFamily="34" charset="0"/>
+              <a:buChar char="•"/>
+            </a:pPr>
+            <a:r>
+              <a:rPr lang="ko-KR" altLang="en-US" sz="1400" dirty="0" err="1">
+                <a:latin typeface="+mn-ea"/>
+              </a:rPr>
+              <a:t>좌회</a:t>
+            </a:r>
+            <a:endParaRPr lang="en-US" altLang="ko-KR" sz="1400" dirty="0">
+              <a:latin typeface="+mn-ea"/>
+            </a:endParaRPr>
+          </a:p>
+        </p:txBody>
+      </p:sp>
+    </p:spTree>
+    <p:extLst>
+      <p:ext uri="{BB962C8B-B14F-4D97-AF65-F5344CB8AC3E}">
+        <p14:creationId xmlns:p14="http://schemas.microsoft.com/office/powerpoint/2010/main" val="481225971"/>
+      </p:ext>
+    </p:extLst>
+  </p:cSld>
+  <p:clrMapOvr>
+    <a:masterClrMapping/>
+  </p:clrMapOvr>
+</p:sld>
+</file>
+
+<file path=ppt/slides/slide7.xml><?xml version="1.0" encoding="utf-8"?>
+<p:sld xmlns:a="http://schemas.openxmlformats.org/drawingml/2006/main" xmlns:r="http://schemas.openxmlformats.org/officeDocument/2006/relationships" xmlns:p="http://schemas.openxmlformats.org/presentationml/2006/main">
+  <p:cSld>
+    <p:spTree>
+      <p:nvGrpSpPr>
+        <p:cNvPr id="1" name="">
+          <a:extLst>
+            <a:ext uri="{FF2B5EF4-FFF2-40B4-BE49-F238E27FC236}">
+              <a16:creationId xmlns:a16="http://schemas.microsoft.com/office/drawing/2014/main" id="{DC10FB9B-2952-3FFC-586F-20871ABFE4FF}"/>
+            </a:ext>
+          </a:extLst>
+        </p:cNvPr>
+        <p:cNvGrpSpPr/>
+        <p:nvPr/>
+      </p:nvGrpSpPr>
+      <p:grpSpPr>
+        <a:xfrm>
+          <a:off x="0" y="0"/>
+          <a:ext cx="0" cy="0"/>
+          <a:chOff x="0" y="0"/>
+          <a:chExt cx="0" cy="0"/>
+        </a:xfrm>
+      </p:grpSpPr>
+      <p:sp>
+        <p:nvSpPr>
+          <p:cNvPr id="2" name="object 2" descr="$PPTXTitle">
+            <a:extLst>
+              <a:ext uri="{FF2B5EF4-FFF2-40B4-BE49-F238E27FC236}">
+                <a16:creationId xmlns:a16="http://schemas.microsoft.com/office/drawing/2014/main" id="{159599C4-E92D-4693-0D12-F90671CD7F29}"/>
+              </a:ext>
+            </a:extLst>
+          </p:cNvPr>
+          <p:cNvSpPr txBox="1">
+            <a:spLocks noGrp="1"/>
+          </p:cNvSpPr>
+          <p:nvPr>
+            <p:ph type="title"/>
+          </p:nvPr>
+        </p:nvSpPr>
+        <p:spPr>
+          <a:prstGeom prst="rect">
+            <a:avLst/>
+          </a:prstGeom>
+        </p:spPr>
+        <p:txBody>
+          <a:bodyPr vert="horz" wrap="square" lIns="0" tIns="12065" rIns="0" bIns="0" rtlCol="0">
+            <a:spAutoFit/>
+          </a:bodyPr>
+          <a:lstStyle/>
+          <a:p>
+            <a:pPr marL="12700">
+              <a:lnSpc>
+                <a:spcPct val="100000"/>
+              </a:lnSpc>
+              <a:spcBef>
+                <a:spcPts val="95"/>
+              </a:spcBef>
+            </a:pPr>
+            <a:r>
+              <a:rPr lang="ko-KR" altLang="en-US" spc="-25" dirty="0"/>
+              <a:t>작업내용 </a:t>
+            </a:r>
+            <a:r>
+              <a:rPr lang="en-US" altLang="ko-KR" spc="-25" dirty="0"/>
+              <a:t>– </a:t>
+            </a:r>
+            <a:r>
+              <a:rPr lang="ko-KR" altLang="en-US" spc="-25" dirty="0"/>
+              <a:t>자율 주행 </a:t>
+            </a:r>
+            <a:r>
+              <a:rPr lang="en-US" altLang="ko-KR" spc="-25" dirty="0"/>
+              <a:t>NPC</a:t>
+            </a:r>
+            <a:endParaRPr spc="-25" dirty="0"/>
+          </a:p>
+        </p:txBody>
+      </p:sp>
+      <p:sp>
+        <p:nvSpPr>
+          <p:cNvPr id="4" name="object 4">
+            <a:extLst>
+              <a:ext uri="{FF2B5EF4-FFF2-40B4-BE49-F238E27FC236}">
+                <a16:creationId xmlns:a16="http://schemas.microsoft.com/office/drawing/2014/main" id="{7E1BC0D9-A810-F91C-488E-BA9629BA5EE4}"/>
+              </a:ext>
+            </a:extLst>
+          </p:cNvPr>
+          <p:cNvSpPr/>
+          <p:nvPr/>
+        </p:nvSpPr>
+        <p:spPr>
+          <a:xfrm>
+            <a:off x="838200" y="1311910"/>
+            <a:ext cx="10515600" cy="0"/>
+          </a:xfrm>
+          <a:custGeom>
+            <a:avLst/>
+            <a:gdLst/>
+            <a:ahLst/>
+            <a:cxnLst/>
+            <a:rect l="l" t="t" r="r" b="b"/>
+            <a:pathLst>
+              <a:path w="10515600">
+                <a:moveTo>
+                  <a:pt x="0" y="0"/>
+                </a:moveTo>
+                <a:lnTo>
+                  <a:pt x="10515600" y="0"/>
+                </a:lnTo>
+              </a:path>
+            </a:pathLst>
+          </a:custGeom>
+          <a:ln w="28575">
+            <a:solidFill>
+              <a:srgbClr val="CF3C1C"/>
+            </a:solidFill>
+          </a:ln>
+        </p:spPr>
+        <p:txBody>
+          <a:bodyPr wrap="square" lIns="0" tIns="0" rIns="0" bIns="0" rtlCol="0"/>
+          <a:lstStyle/>
+          <a:p>
+            <a:endParaRPr/>
+          </a:p>
+        </p:txBody>
+      </p:sp>
+      <p:sp>
+        <p:nvSpPr>
+          <p:cNvPr id="7" name="내용 개체 틀 2">
+            <a:extLst>
+              <a:ext uri="{FF2B5EF4-FFF2-40B4-BE49-F238E27FC236}">
+                <a16:creationId xmlns:a16="http://schemas.microsoft.com/office/drawing/2014/main" id="{9ED638F5-A714-F4FA-9B02-E9D2E69E3B89}"/>
+              </a:ext>
+            </a:extLst>
+          </p:cNvPr>
+          <p:cNvSpPr txBox="1">
+            <a:spLocks/>
+          </p:cNvSpPr>
+          <p:nvPr/>
+        </p:nvSpPr>
+        <p:spPr>
+          <a:xfrm>
+            <a:off x="1028700" y="1520351"/>
+            <a:ext cx="10134600" cy="773994"/>
+          </a:xfrm>
+          <a:prstGeom prst="rect">
+            <a:avLst/>
+          </a:prstGeom>
+        </p:spPr>
+        <p:txBody>
+          <a:bodyPr wrap="square" lIns="0" tIns="0" rIns="0" bIns="0">
+            <a:spAutoFit/>
+          </a:bodyPr>
+          <a:lstStyle>
+            <a:lvl1pPr marL="0">
+              <a:defRPr b="0" i="0">
+                <a:solidFill>
+                  <a:schemeClr val="tx1"/>
+                </a:solidFill>
+                <a:latin typeface="+mn-lt"/>
+                <a:ea typeface="+mn-ea"/>
+                <a:cs typeface="+mn-cs"/>
+              </a:defRPr>
+            </a:lvl1pPr>
+            <a:lvl2pPr marL="457200">
+              <a:defRPr>
+                <a:latin typeface="+mn-lt"/>
+                <a:ea typeface="+mn-ea"/>
+                <a:cs typeface="+mn-cs"/>
+              </a:defRPr>
+            </a:lvl2pPr>
+            <a:lvl3pPr marL="914400">
+              <a:defRPr>
+                <a:latin typeface="+mn-lt"/>
+                <a:ea typeface="+mn-ea"/>
+                <a:cs typeface="+mn-cs"/>
+              </a:defRPr>
+            </a:lvl3pPr>
+            <a:lvl4pPr marL="1371600">
+              <a:defRPr>
+                <a:latin typeface="+mn-lt"/>
+                <a:ea typeface="+mn-ea"/>
+                <a:cs typeface="+mn-cs"/>
+              </a:defRPr>
+            </a:lvl4pPr>
+            <a:lvl5pPr marL="1828800">
+              <a:defRPr>
+                <a:latin typeface="+mn-lt"/>
+                <a:ea typeface="+mn-ea"/>
+                <a:cs typeface="+mn-cs"/>
+              </a:defRPr>
+            </a:lvl5pPr>
+            <a:lvl6pPr marL="2286000">
+              <a:defRPr>
+                <a:latin typeface="+mn-lt"/>
+                <a:ea typeface="+mn-ea"/>
+                <a:cs typeface="+mn-cs"/>
+              </a:defRPr>
+            </a:lvl6pPr>
+            <a:lvl7pPr marL="2743200">
+              <a:defRPr>
+                <a:latin typeface="+mn-lt"/>
+                <a:ea typeface="+mn-ea"/>
+                <a:cs typeface="+mn-cs"/>
+              </a:defRPr>
+            </a:lvl7pPr>
+            <a:lvl8pPr marL="3200400">
+              <a:defRPr>
+                <a:latin typeface="+mn-lt"/>
+                <a:ea typeface="+mn-ea"/>
+                <a:cs typeface="+mn-cs"/>
+              </a:defRPr>
+            </a:lvl8pPr>
+            <a:lvl9pPr marL="3657600">
+              <a:defRPr>
+                <a:latin typeface="+mn-lt"/>
+                <a:ea typeface="+mn-ea"/>
+                <a:cs typeface="+mn-cs"/>
+              </a:defRPr>
+            </a:lvl9pPr>
+          </a:lstStyle>
+          <a:p>
+            <a:pPr marL="285750" indent="-285750">
+              <a:lnSpc>
+                <a:spcPct val="200000"/>
+              </a:lnSpc>
+              <a:buFont typeface="Arial" panose="020B0604020202020204" pitchFamily="34" charset="0"/>
+              <a:buChar char="•"/>
+            </a:pPr>
+            <a:r>
+              <a:rPr lang="en-US" altLang="ko-KR" sz="1600" dirty="0">
+                <a:latin typeface="+mn-ea"/>
+                <a:cs typeface="Malgun Gothic"/>
+              </a:rPr>
+              <a:t> </a:t>
+            </a:r>
+            <a:r>
+              <a:rPr lang="ko-KR" altLang="en-US" sz="1600" dirty="0">
+                <a:latin typeface="+mn-ea"/>
+                <a:cs typeface="Malgun Gothic"/>
+              </a:rPr>
+              <a:t>추격 </a:t>
+            </a:r>
+            <a:r>
+              <a:rPr lang="en-US" altLang="ko-KR" sz="1600" dirty="0">
+                <a:latin typeface="+mn-ea"/>
+                <a:cs typeface="Malgun Gothic"/>
+              </a:rPr>
+              <a:t>()</a:t>
+            </a:r>
+            <a:endParaRPr lang="en-US" altLang="ko-KR" sz="1200" dirty="0">
+              <a:latin typeface="Malgun Gothic"/>
+              <a:cs typeface="Malgun Gothic"/>
+            </a:endParaRPr>
+          </a:p>
+          <a:p>
+            <a:pPr marL="742950" lvl="1" indent="-285750">
+              <a:lnSpc>
+                <a:spcPct val="150000"/>
+              </a:lnSpc>
+              <a:buFont typeface="Arial" panose="020B0604020202020204" pitchFamily="34" charset="0"/>
+              <a:buChar char="•"/>
+            </a:pPr>
+            <a:r>
+              <a:rPr lang="ko-KR" altLang="en-US" sz="1400" dirty="0" err="1">
+                <a:latin typeface="+mn-ea"/>
+              </a:rPr>
+              <a:t>좌회</a:t>
+            </a:r>
+            <a:endParaRPr lang="en-US" altLang="ko-KR" sz="1400" dirty="0">
+              <a:latin typeface="+mn-ea"/>
+            </a:endParaRPr>
+          </a:p>
+        </p:txBody>
+      </p:sp>
+    </p:spTree>
+    <p:extLst>
+      <p:ext uri="{BB962C8B-B14F-4D97-AF65-F5344CB8AC3E}">
+        <p14:creationId xmlns:p14="http://schemas.microsoft.com/office/powerpoint/2010/main" val="711536196"/>
+      </p:ext>
+    </p:extLst>
+  </p:cSld>
+  <p:clrMapOvr>
+    <a:masterClrMapping/>
+  </p:clrMapOvr>
+</p:sld>
+</file>
+
+<file path=ppt/slides/slide8.xml><?xml version="1.0" encoding="utf-8"?>
+<p:sld xmlns:a="http://schemas.openxmlformats.org/drawingml/2006/main" xmlns:r="http://schemas.openxmlformats.org/officeDocument/2006/relationships" xmlns:p="http://schemas.openxmlformats.org/presentationml/2006/main">
+  <p:cSld>
+    <p:spTree>
+      <p:nvGrpSpPr>
+        <p:cNvPr id="1" name="">
+          <a:extLst>
+            <a:ext uri="{FF2B5EF4-FFF2-40B4-BE49-F238E27FC236}">
+              <a16:creationId xmlns:a16="http://schemas.microsoft.com/office/drawing/2014/main" id="{EE06B815-1E4A-AAEA-8517-DC332E580657}"/>
+            </a:ext>
+          </a:extLst>
+        </p:cNvPr>
+        <p:cNvGrpSpPr/>
+        <p:nvPr/>
+      </p:nvGrpSpPr>
+      <p:grpSpPr>
+        <a:xfrm>
+          <a:off x="0" y="0"/>
+          <a:ext cx="0" cy="0"/>
+          <a:chOff x="0" y="0"/>
+          <a:chExt cx="0" cy="0"/>
+        </a:xfrm>
+      </p:grpSpPr>
+      <p:sp>
+        <p:nvSpPr>
+          <p:cNvPr id="2" name="object 2" descr="$PPTXTitle">
+            <a:extLst>
+              <a:ext uri="{FF2B5EF4-FFF2-40B4-BE49-F238E27FC236}">
+                <a16:creationId xmlns:a16="http://schemas.microsoft.com/office/drawing/2014/main" id="{B29CADE7-F915-2793-B851-12671CAAA5A4}"/>
+              </a:ext>
+            </a:extLst>
+          </p:cNvPr>
+          <p:cNvSpPr txBox="1">
+            <a:spLocks noGrp="1"/>
+          </p:cNvSpPr>
+          <p:nvPr>
+            <p:ph type="title"/>
+          </p:nvPr>
+        </p:nvSpPr>
+        <p:spPr>
+          <a:prstGeom prst="rect">
+            <a:avLst/>
+          </a:prstGeom>
+        </p:spPr>
+        <p:txBody>
+          <a:bodyPr vert="horz" wrap="square" lIns="0" tIns="12065" rIns="0" bIns="0" rtlCol="0">
+            <a:spAutoFit/>
+          </a:bodyPr>
+          <a:lstStyle/>
+          <a:p>
+            <a:pPr marL="12700">
+              <a:lnSpc>
+                <a:spcPct val="100000"/>
+              </a:lnSpc>
+              <a:spcBef>
+                <a:spcPts val="95"/>
+              </a:spcBef>
+            </a:pPr>
+            <a:r>
+              <a:rPr lang="ko-KR" altLang="en-US" spc="-25" dirty="0"/>
+              <a:t>추가작업 </a:t>
+            </a:r>
+            <a:r>
+              <a:rPr lang="en-US" altLang="ko-KR" spc="-25" dirty="0"/>
+              <a:t>– </a:t>
+            </a:r>
+            <a:r>
+              <a:rPr lang="ko-KR" altLang="en-US" spc="-25" dirty="0"/>
+              <a:t>차종 추가</a:t>
+            </a:r>
+            <a:endParaRPr spc="-25" dirty="0"/>
+          </a:p>
+        </p:txBody>
+      </p:sp>
+      <p:sp>
+        <p:nvSpPr>
+          <p:cNvPr id="4" name="object 4">
+            <a:extLst>
+              <a:ext uri="{FF2B5EF4-FFF2-40B4-BE49-F238E27FC236}">
+                <a16:creationId xmlns:a16="http://schemas.microsoft.com/office/drawing/2014/main" id="{333B0F94-FA19-57AB-93F3-A2C77FB3BA7A}"/>
+              </a:ext>
+            </a:extLst>
+          </p:cNvPr>
+          <p:cNvSpPr/>
+          <p:nvPr/>
+        </p:nvSpPr>
+        <p:spPr>
+          <a:xfrm>
+            <a:off x="838200" y="1311910"/>
+            <a:ext cx="10515600" cy="0"/>
+          </a:xfrm>
+          <a:custGeom>
+            <a:avLst/>
+            <a:gdLst/>
+            <a:ahLst/>
+            <a:cxnLst/>
+            <a:rect l="l" t="t" r="r" b="b"/>
+            <a:pathLst>
+              <a:path w="10515600">
+                <a:moveTo>
+                  <a:pt x="0" y="0"/>
+                </a:moveTo>
+                <a:lnTo>
+                  <a:pt x="10515600" y="0"/>
+                </a:lnTo>
+              </a:path>
+            </a:pathLst>
+          </a:custGeom>
+          <a:ln w="28575">
+            <a:solidFill>
+              <a:srgbClr val="CF3C1C"/>
+            </a:solidFill>
+          </a:ln>
+        </p:spPr>
+        <p:txBody>
+          <a:bodyPr wrap="square" lIns="0" tIns="0" rIns="0" bIns="0" rtlCol="0"/>
+          <a:lstStyle/>
+          <a:p>
+            <a:endParaRPr/>
+          </a:p>
+        </p:txBody>
+      </p:sp>
+      <p:sp>
+        <p:nvSpPr>
+          <p:cNvPr id="7" name="내용 개체 틀 2">
+            <a:extLst>
+              <a:ext uri="{FF2B5EF4-FFF2-40B4-BE49-F238E27FC236}">
+                <a16:creationId xmlns:a16="http://schemas.microsoft.com/office/drawing/2014/main" id="{A0F7A6AF-D592-91AD-4C57-1A798A9AA7FD}"/>
+              </a:ext>
+            </a:extLst>
+          </p:cNvPr>
+          <p:cNvSpPr txBox="1">
+            <a:spLocks/>
+          </p:cNvSpPr>
+          <p:nvPr/>
+        </p:nvSpPr>
+        <p:spPr>
+          <a:xfrm>
+            <a:off x="1028700" y="1520351"/>
+            <a:ext cx="10134600" cy="1103635"/>
+          </a:xfrm>
+          <a:prstGeom prst="rect">
+            <a:avLst/>
+          </a:prstGeom>
+        </p:spPr>
+        <p:txBody>
+          <a:bodyPr wrap="square" lIns="0" tIns="0" rIns="0" bIns="0">
+            <a:spAutoFit/>
+          </a:bodyPr>
+          <a:lstStyle>
+            <a:lvl1pPr marL="0">
+              <a:defRPr b="0" i="0">
+                <a:solidFill>
+                  <a:schemeClr val="tx1"/>
+                </a:solidFill>
+                <a:latin typeface="+mn-lt"/>
+                <a:ea typeface="+mn-ea"/>
+                <a:cs typeface="+mn-cs"/>
+              </a:defRPr>
+            </a:lvl1pPr>
+            <a:lvl2pPr marL="457200">
+              <a:defRPr>
+                <a:latin typeface="+mn-lt"/>
+                <a:ea typeface="+mn-ea"/>
+                <a:cs typeface="+mn-cs"/>
+              </a:defRPr>
+            </a:lvl2pPr>
+            <a:lvl3pPr marL="914400">
+              <a:defRPr>
+                <a:latin typeface="+mn-lt"/>
+                <a:ea typeface="+mn-ea"/>
+                <a:cs typeface="+mn-cs"/>
+              </a:defRPr>
+            </a:lvl3pPr>
+            <a:lvl4pPr marL="1371600">
+              <a:defRPr>
+                <a:latin typeface="+mn-lt"/>
+                <a:ea typeface="+mn-ea"/>
+                <a:cs typeface="+mn-cs"/>
+              </a:defRPr>
+            </a:lvl4pPr>
+            <a:lvl5pPr marL="1828800">
+              <a:defRPr>
+                <a:latin typeface="+mn-lt"/>
+                <a:ea typeface="+mn-ea"/>
+                <a:cs typeface="+mn-cs"/>
+              </a:defRPr>
+            </a:lvl5pPr>
+            <a:lvl6pPr marL="2286000">
+              <a:defRPr>
+                <a:latin typeface="+mn-lt"/>
+                <a:ea typeface="+mn-ea"/>
+                <a:cs typeface="+mn-cs"/>
+              </a:defRPr>
+            </a:lvl6pPr>
+            <a:lvl7pPr marL="2743200">
+              <a:defRPr>
+                <a:latin typeface="+mn-lt"/>
+                <a:ea typeface="+mn-ea"/>
+                <a:cs typeface="+mn-cs"/>
+              </a:defRPr>
+            </a:lvl7pPr>
+            <a:lvl8pPr marL="3200400">
+              <a:defRPr>
+                <a:latin typeface="+mn-lt"/>
+                <a:ea typeface="+mn-ea"/>
+                <a:cs typeface="+mn-cs"/>
+              </a:defRPr>
+            </a:lvl8pPr>
+            <a:lvl9pPr marL="3657600">
+              <a:defRPr>
+                <a:latin typeface="+mn-lt"/>
+                <a:ea typeface="+mn-ea"/>
+                <a:cs typeface="+mn-cs"/>
+              </a:defRPr>
+            </a:lvl9pPr>
+          </a:lstStyle>
+          <a:p>
+            <a:pPr marL="285750" indent="-285750">
+              <a:lnSpc>
+                <a:spcPct val="200000"/>
+              </a:lnSpc>
+              <a:buFont typeface="Arial" panose="020B0604020202020204" pitchFamily="34" charset="0"/>
+              <a:buChar char="•"/>
+            </a:pPr>
+            <a:r>
+              <a:rPr lang="ko-KR" altLang="en-US" sz="1600" dirty="0">
+                <a:latin typeface="+mn-ea"/>
+                <a:cs typeface="Malgun Gothic"/>
+              </a:rPr>
+              <a:t>차량 </a:t>
+            </a:r>
+            <a:r>
+              <a:rPr lang="en-US" altLang="ko-KR" sz="1600" dirty="0">
+                <a:latin typeface="+mn-ea"/>
+                <a:cs typeface="Malgun Gothic"/>
+              </a:rPr>
+              <a:t>3</a:t>
+            </a:r>
+            <a:r>
+              <a:rPr lang="ko-KR" altLang="en-US" sz="1600" dirty="0">
+                <a:latin typeface="+mn-ea"/>
+                <a:cs typeface="Malgun Gothic"/>
+              </a:rPr>
+              <a:t>종 추가</a:t>
+            </a:r>
+            <a:endParaRPr lang="en-US" altLang="ko-KR" sz="1200" dirty="0">
+              <a:latin typeface="Malgun Gothic"/>
+              <a:cs typeface="Malgun Gothic"/>
+            </a:endParaRPr>
+          </a:p>
+          <a:p>
+            <a:pPr marL="742950" lvl="1" indent="-285750">
+              <a:lnSpc>
+                <a:spcPct val="150000"/>
+              </a:lnSpc>
+              <a:buFont typeface="Arial" panose="020B0604020202020204" pitchFamily="34" charset="0"/>
+              <a:buChar char="•"/>
+            </a:pPr>
+            <a:r>
+              <a:rPr lang="ko-KR" altLang="en-US" sz="1400" dirty="0"/>
+              <a:t>기존 </a:t>
+            </a:r>
+            <a:r>
+              <a:rPr lang="en-US" altLang="ko-KR" sz="1400" dirty="0"/>
+              <a:t>2</a:t>
+            </a:r>
+            <a:r>
+              <a:rPr lang="ko-KR" altLang="en-US" sz="1400" dirty="0"/>
+              <a:t>종 </a:t>
+            </a:r>
+            <a:r>
+              <a:rPr lang="en-US" altLang="ko-KR" sz="1400" dirty="0"/>
+              <a:t>+ 3</a:t>
+            </a:r>
+            <a:r>
+              <a:rPr lang="ko-KR" altLang="en-US" sz="1400" dirty="0"/>
+              <a:t>종</a:t>
+            </a:r>
+            <a:endParaRPr lang="en-US" altLang="ko-KR" sz="1400" dirty="0"/>
+          </a:p>
+          <a:p>
+            <a:pPr marL="742950" lvl="1" indent="-285750">
+              <a:lnSpc>
+                <a:spcPct val="150000"/>
+              </a:lnSpc>
+              <a:buFont typeface="Arial" panose="020B0604020202020204" pitchFamily="34" charset="0"/>
+              <a:buChar char="•"/>
+            </a:pPr>
+            <a:r>
+              <a:rPr lang="ko-KR" altLang="en-US" sz="1400" dirty="0"/>
+              <a:t>길쭉한 트럭 </a:t>
+            </a:r>
+            <a:r>
+              <a:rPr lang="en-US" altLang="ko-KR" sz="1400" dirty="0"/>
+              <a:t>: </a:t>
+            </a:r>
+            <a:r>
+              <a:rPr lang="ko-KR" altLang="en-US" sz="1400" dirty="0"/>
+              <a:t>맵 크기로 인해 제외</a:t>
+            </a:r>
+            <a:endParaRPr lang="en-US" altLang="ko-KR" sz="1400" dirty="0">
+              <a:latin typeface="+mn-ea"/>
+            </a:endParaRPr>
+          </a:p>
+        </p:txBody>
+      </p:sp>
+      <p:pic>
+        <p:nvPicPr>
+          <p:cNvPr id="5" name="그림 4">
+            <a:extLst>
+              <a:ext uri="{FF2B5EF4-FFF2-40B4-BE49-F238E27FC236}">
+                <a16:creationId xmlns:a16="http://schemas.microsoft.com/office/drawing/2014/main" id="{447B8077-9023-55D8-CFF6-BAF8CE37177A}"/>
+              </a:ext>
+            </a:extLst>
+          </p:cNvPr>
+          <p:cNvPicPr>
+            <a:picLocks noChangeAspect="1"/>
+          </p:cNvPicPr>
+          <p:nvPr/>
+        </p:nvPicPr>
+        <p:blipFill>
+          <a:blip r:embed="rId3"/>
+          <a:stretch>
+            <a:fillRect/>
+          </a:stretch>
+        </p:blipFill>
+        <p:spPr>
+          <a:xfrm>
+            <a:off x="5234158" y="3200400"/>
+            <a:ext cx="6087091" cy="3352502"/>
+          </a:xfrm>
+          <a:prstGeom prst="rect">
+            <a:avLst/>
+          </a:prstGeom>
+        </p:spPr>
+      </p:pic>
+      <p:pic>
+        <p:nvPicPr>
+          <p:cNvPr id="12" name="그림 11">
+            <a:extLst>
+              <a:ext uri="{FF2B5EF4-FFF2-40B4-BE49-F238E27FC236}">
+                <a16:creationId xmlns:a16="http://schemas.microsoft.com/office/drawing/2014/main" id="{61169B62-78C5-E037-2604-BDDAA6CC4BEF}"/>
+              </a:ext>
+            </a:extLst>
+          </p:cNvPr>
+          <p:cNvPicPr>
+            <a:picLocks noChangeAspect="1"/>
+          </p:cNvPicPr>
+          <p:nvPr/>
+        </p:nvPicPr>
+        <p:blipFill>
+          <a:blip r:embed="rId4">
+            <a:extLst>
+              <a:ext uri="{28A0092B-C50C-407E-A947-70E740481C1C}">
+                <a14:useLocalDpi xmlns:a14="http://schemas.microsoft.com/office/drawing/2010/main" val="0"/>
+              </a:ext>
+            </a:extLst>
+          </a:blip>
+          <a:stretch>
+            <a:fillRect/>
+          </a:stretch>
+        </p:blipFill>
+        <p:spPr>
+          <a:xfrm>
+            <a:off x="1371600" y="3336234"/>
+            <a:ext cx="3521157" cy="3213709"/>
+          </a:xfrm>
+          <a:prstGeom prst="rect">
+            <a:avLst/>
+          </a:prstGeom>
+        </p:spPr>
+      </p:pic>
+    </p:spTree>
+    <p:extLst>
+      <p:ext uri="{BB962C8B-B14F-4D97-AF65-F5344CB8AC3E}">
+        <p14:creationId xmlns:p14="http://schemas.microsoft.com/office/powerpoint/2010/main" val="2768170045"/>
+      </p:ext>
+    </p:extLst>
+  </p:cSld>
+  <p:clrMapOvr>
+    <a:masterClrMapping/>
+  </p:clrMapOvr>
+</p:sld>
+</file>
+
+<file path=ppt/slides/slide9.xml><?xml version="1.0" encoding="utf-8"?>
 <p:sld xmlns:a="http://schemas.openxmlformats.org/drawingml/2006/main" xmlns:r="http://schemas.openxmlformats.org/officeDocument/2006/relationships" xmlns:p="http://schemas.openxmlformats.org/presentationml/2006/main" showMasterSp="0">
   <p:cSld>
     <p:spTree>
